--- a/artefatos/gerente_de_projetos/reports/sprint_02_20260510_Interno.pptx
+++ b/artefatos/gerente_de_projetos/reports/sprint_02_20260510_Interno.pptx
@@ -14,6 +14,15 @@
     <p:sldId id="287" r:id="rId36"/>
     <p:sldId id="288" r:id="rId37"/>
     <p:sldId id="289" r:id="rId38"/>
+    <p:sldId id="290" r:id="rId39"/>
+    <p:sldId id="291" r:id="rId40"/>
+    <p:sldId id="292" r:id="rId41"/>
+    <p:sldId id="293" r:id="rId42"/>
+    <p:sldId id="294" r:id="rId43"/>
+    <p:sldId id="295" r:id="rId44"/>
+    <p:sldId id="296" r:id="rId45"/>
+    <p:sldId id="297" r:id="rId46"/>
+    <p:sldId id="298" r:id="rId47"/>
     <p:sldId id="266" r:id="rId5"/>
     <p:sldId id="267" r:id="rId6"/>
     <p:sldId id="280" r:id="rId29"/>
@@ -8451,7 +8460,7 @@
                 <a:uFillTx/>
                 <a:latin typeface="Calibri"/>
               </a:rPr>
-              <a:t> - 15/05/2026</a:t>
+              <a:t> - 10/06/2026</a:t>
             </a:r>
             <a:r>
               <a:rPr lang="pt-BR" sz="3200" b="0" u="none" strike="noStrike" dirty="0" err="1">
@@ -8514,7 +8523,7 @@
                 <a:uFillTx/>
                 <a:latin typeface="Calibri"/>
               </a:rPr>
-              <a:t>19</a:t>
+              <a:t>45</a:t>
             </a:r>
             <a:r>
               <a:rPr lang="pt-BR" sz="3200" b="0" u="none" strike="noStrike" dirty="0" err="1">
@@ -8675,7 +8684,7 @@
                 <a:latin typeface="Calibri"/>
                 <a:ea typeface="Microsoft YaHei"/>
               </a:rPr>
-              <a:t>Mapear modelo de dados das principais tabelas (entidades de negócio e relacionamentos).</a:t>
+              <a:t>Avançar REQ-002 (fluxo conversacional guiado) com base no backlog formal de 11 tarefas.</a:t>
             </a:r>
             <a:r>
               <a:rPr lang="en-US" sz="2000" b="0" u="none" strike="noStrike" dirty="0" err="1">
@@ -8737,7 +8746,69 @@
                 <a:latin typeface="Calibri"/>
                 <a:ea typeface="Microsoft YaHei"/>
               </a:rPr>
-              <a:t>Cadastro de tipos de produtos.</a:t>
+              <a:t>Concluir migração REQ-016 (renomeação Negociação→Atendimento em modelos, schemas, serviços e frontend).</a:t>
+            </a:r>
+            <a:r>
+              <a:rPr lang="en-US" sz="2000" b="0" u="none" strike="noStrike" dirty="0" err="1">
+                <a:solidFill>
+                  <a:schemeClr val="dk1"/>
+                </a:solidFill>
+                <a:effectLst/>
+                <a:uFillTx/>
+                <a:latin typeface="Calibri"/>
+                <a:ea typeface="Microsoft YaHei"/>
+              </a:rPr>
+              <a:t/>
+            </a:r>
+            <a:r>
+              <a:rPr lang="en-US" sz="2000" b="0" u="none" strike="noStrike" dirty="0">
+                <a:solidFill>
+                  <a:schemeClr val="dk1"/>
+                </a:solidFill>
+                <a:effectLst/>
+                <a:uFillTx/>
+                <a:latin typeface="Calibri"/>
+                <a:ea typeface="Microsoft YaHei"/>
+              </a:rPr>
+              <a:t> </a:t>
+            </a:r>
+            <a:endParaRPr lang="en-US" sz="2000" b="0" u="none" strike="noStrike" dirty="0">
+              <a:solidFill>
+                <a:schemeClr val="dk1"/>
+              </a:solidFill>
+              <a:effectLst/>
+              <a:uFillTx/>
+              <a:latin typeface="Calibri"/>
+            </a:endParaRPr>
+          </a:p>
+          <a:p>
+            <a:pPr marL="343080" indent="-343080" algn="l" defTabSz="457200">
+              <a:lnSpc>
+                <a:spcPct val="100000"/>
+              </a:lnSpc>
+              <a:spcBef>
+                <a:spcPts val="641"/>
+              </a:spcBef>
+              <a:buClr>
+                <a:srgbClr val="000000"/>
+              </a:buClr>
+              <a:buFont typeface="Arial"/>
+              <a:buChar char="•"/>
+              <a:tabLst>
+                <a:tab pos="0" algn="l"/>
+              </a:tabLst>
+            </a:pPr>
+            <a:r>
+              <a:rPr lang="en-US" sz="2000" b="0" u="none" strike="noStrike" dirty="0">
+                <a:solidFill>
+                  <a:schemeClr val="dk1"/>
+                </a:solidFill>
+                <a:effectLst/>
+                <a:uFillTx/>
+                <a:latin typeface="Calibri"/>
+                <a:ea typeface="Microsoft YaHei"/>
+              </a:rPr>
+              <a:t>Cadastro de tipos de produtos e produtos (REQ-002).</a:t>
             </a:r>
             <a:r>
               <a:rPr lang="en-US" sz="2000" b="0" u="none" strike="noStrike" dirty="0" err="1">
@@ -15860,7 +15931,7 @@
                 <a:latin typeface="Calibri"/>
                 <a:ea typeface="Microsoft YaHei"/>
               </a:rPr>
-              <a:t>Simplificação dos agentes Python (condensar prompts no AGENTS.md) (baixa)</a:t>
+              <a:t>REQ-006 — Rastreamento de orçamentos (media)</a:t>
             </a:r>
             <a:r>
               <a:rPr lang="pt-BR" sz="2400" b="0" u="none" strike="noStrike" dirty="0">
@@ -21769,6 +21840,3681 @@
                 <a:ea typeface="Microsoft YaHei"/>
               </a:rPr>
               <a:t>REQ-011: antes ~20%, depois ~25%, delta +5</a:t>
+            </a:r>
+            <a:r>
+              <a:rPr lang="en-US" sz="2600" b="0" u="none" strike="noStrike" dirty="0" err="1">
+                <a:solidFill>
+                  <a:schemeClr val="dk1"/>
+                </a:solidFill>
+                <a:effectLst/>
+                <a:uFillTx/>
+                <a:latin typeface="Calibri"/>
+                <a:ea typeface="Microsoft YaHei"/>
+              </a:rPr>
+              <a:t/>
+            </a:r>
+            <a:r>
+              <a:rPr lang="en-US" sz="2600" dirty="0" err="1">
+                <a:solidFill>
+                  <a:schemeClr val="dk1"/>
+                </a:solidFill>
+                <a:latin typeface="Calibri"/>
+                <a:ea typeface="Microsoft YaHei"/>
+              </a:rPr>
+              <a:t/>
+            </a:r>
+            <a:r>
+              <a:rPr lang="en-US" sz="2600" b="0" u="none" strike="noStrike" dirty="0" err="1">
+                <a:solidFill>
+                  <a:schemeClr val="dk1"/>
+                </a:solidFill>
+                <a:effectLst/>
+                <a:uFillTx/>
+                <a:latin typeface="Calibri"/>
+                <a:ea typeface="Microsoft YaHei"/>
+              </a:rPr>
+              <a:t/>
+            </a:r>
+            <a:r>
+              <a:rPr lang="en-US" sz="2600" b="0" u="none" strike="noStrike" dirty="0">
+                <a:solidFill>
+                  <a:schemeClr val="dk1"/>
+                </a:solidFill>
+                <a:effectLst/>
+                <a:uFillTx/>
+                <a:latin typeface="Calibri"/>
+                <a:ea typeface="Microsoft YaHei"/>
+              </a:rPr>
+              <a:t/>
+            </a:r>
+            <a:endParaRPr lang="en-US" sz="2600" b="0" u="none" strike="noStrike" dirty="0">
+              <a:solidFill>
+                <a:schemeClr val="dk1"/>
+              </a:solidFill>
+              <a:effectLst/>
+              <a:uFillTx/>
+              <a:latin typeface="Calibri"/>
+            </a:endParaRPr>
+          </a:p>
+        </p:txBody>
+      </p:sp>
+      <p:pic>
+        <p:nvPicPr>
+          <p:cNvPr id="72" name="Imagem 71"/>
+          <p:cNvPicPr/>
+          <p:nvPr/>
+        </p:nvPicPr>
+        <p:blipFill>
+          <a:blip r:embed="rId2"/>
+          <a:stretch/>
+        </p:blipFill>
+        <p:spPr>
+          <a:xfrm>
+            <a:off x="720" y="-28800"/>
+            <a:ext cx="9142560" cy="1647720"/>
+          </a:xfrm>
+          <a:prstGeom prst="rect">
+            <a:avLst/>
+          </a:prstGeom>
+          <a:noFill/>
+          <a:ln w="0">
+            <a:noFill/>
+          </a:ln>
+        </p:spPr>
+      </p:pic>
+      <p:sp>
+        <p:nvSpPr>
+          <p:cNvPr id="73" name="Title 3"/>
+          <p:cNvSpPr/>
+          <p:nvPr/>
+        </p:nvSpPr>
+        <p:spPr>
+          <a:xfrm>
+            <a:off x="915480" y="180000"/>
+            <a:ext cx="8228160" cy="1141560"/>
+          </a:xfrm>
+          <a:prstGeom prst="rect">
+            <a:avLst/>
+          </a:prstGeom>
+          <a:noFill/>
+          <a:ln w="0">
+            <a:noFill/>
+          </a:ln>
+        </p:spPr>
+        <p:style>
+          <a:lnRef idx="0">
+            <a:scrgbClr r="0" g="0" b="0"/>
+          </a:lnRef>
+          <a:fillRef idx="0">
+            <a:scrgbClr r="0" g="0" b="0"/>
+          </a:fillRef>
+          <a:effectRef idx="0">
+            <a:scrgbClr r="0" g="0" b="0"/>
+          </a:effectRef>
+          <a:fontRef idx="minor"/>
+        </p:style>
+        <p:txBody>
+          <a:bodyPr lIns="90000" tIns="45000" rIns="90000" bIns="45000" anchor="ctr">
+            <a:noAutofit/>
+          </a:bodyPr>
+          <a:lstStyle/>
+          <a:p>
+            <a:pPr algn="ctr" defTabSz="457200">
+              <a:lnSpc>
+                <a:spcPct val="100000"/>
+              </a:lnSpc>
+            </a:pPr>
+            <a:r>
+              <a:rPr lang="en-US" sz="4400" b="0" u="none" strike="noStrike">
+                <a:solidFill>
+                  <a:srgbClr val="EA7500"/>
+                </a:solidFill>
+                <a:effectLst/>
+                <a:uFillTx/>
+                <a:latin typeface="Calibri"/>
+              </a:rPr>
+              <a:t>Realizações da Sprint</a:t>
+            </a:r>
+            <a:endParaRPr lang="pt-BR" sz="4400" b="0" u="none" strike="noStrike">
+              <a:solidFill>
+                <a:srgbClr val="000000"/>
+              </a:solidFill>
+              <a:effectLst/>
+              <a:uFillTx/>
+              <a:latin typeface="Arial"/>
+            </a:endParaRPr>
+          </a:p>
+        </p:txBody>
+      </p:sp>
+    </p:spTree>
+  </p:cSld>
+  <p:clrMapOvr>
+    <a:masterClrMapping/>
+  </p:clrMapOvr>
+</p:sld>
+</file>
+
+<file path=ppt/slides/slide34.xml><?xml version="1.0" encoding="utf-8"?>
+<p:sld xmlns:a="http://schemas.openxmlformats.org/drawingml/2006/main" xmlns:p="http://schemas.openxmlformats.org/presentationml/2006/main" xmlns:r="http://schemas.openxmlformats.org/officeDocument/2006/relationships">
+  <p:cSld>
+    <p:spTree>
+      <p:nvGrpSpPr>
+        <p:cNvPr id="1" name=""/>
+        <p:cNvGrpSpPr/>
+        <p:nvPr/>
+      </p:nvGrpSpPr>
+      <p:grpSpPr/>
+      <p:sp>
+        <p:nvSpPr>
+          <p:cNvPr id="71" name="PlaceHolder 1"/>
+          <p:cNvSpPr>
+            <a:spLocks noGrp="1"/>
+          </p:cNvSpPr>
+          <p:nvPr>
+            <p:ph/>
+          </p:nvPr>
+        </p:nvSpPr>
+        <p:spPr>
+          <a:xfrm>
+            <a:off x="411120" y="1321560"/>
+            <a:ext cx="8228160" cy="4637520"/>
+          </a:xfrm>
+          <a:prstGeom prst="rect">
+            <a:avLst/>
+          </a:prstGeom>
+          <a:noFill/>
+          <a:ln w="0">
+            <a:noFill/>
+          </a:ln>
+        </p:spPr>
+        <p:txBody>
+          <a:bodyPr lIns="91440" tIns="45720" rIns="91440" bIns="45720" anchor="t">
+            <a:noAutofit/>
+          </a:bodyPr>
+          <a:lstStyle/>
+          <a:p>
+            <a:pPr indent="0" algn="l" defTabSz="457200">
+              <a:lnSpc>
+                <a:spcPct val="100000"/>
+              </a:lnSpc>
+              <a:spcBef>
+                <a:spcPts val="641"/>
+              </a:spcBef>
+              <a:buNone/>
+              <a:tabLst>
+                <a:tab pos="0" algn="l"/>
+              </a:tabLst>
+            </a:pPr>
+            <a:endParaRPr lang="en-US" sz="3200" b="0" u="none" strike="noStrike" dirty="0">
+              <a:solidFill>
+                <a:schemeClr val="dk1"/>
+              </a:solidFill>
+              <a:effectLst/>
+              <a:uFillTx/>
+              <a:latin typeface="Calibri"/>
+            </a:endParaRPr>
+          </a:p>
+          <a:p>
+            <a:pPr marL="343080" indent="0" algn="l" defTabSz="457200">
+              <a:lnSpc>
+                <a:spcPct val="100000"/>
+              </a:lnSpc>
+              <a:spcBef>
+                <a:spcPts val="641"/>
+              </a:spcBef>
+              <a:buNone/>
+              <a:tabLst>
+                <a:tab pos="0" algn="l"/>
+              </a:tabLst>
+            </a:pPr>
+            <a:r>
+              <a:rPr lang="en-US" sz="3200" b="0" u="none" strike="noStrike" dirty="0">
+                <a:solidFill>
+                  <a:schemeClr val="dk1"/>
+                </a:solidFill>
+                <a:effectLst/>
+                <a:uFillTx/>
+                <a:latin typeface="Calibri"/>
+              </a:rPr>
+              <a:t/>
+            </a:r>
+            <a:r>
+              <a:rPr lang="en-US" sz="3200" b="0" u="none" strike="noStrike" dirty="0" err="1">
+                <a:solidFill>
+                  <a:schemeClr val="dk1"/>
+                </a:solidFill>
+                <a:effectLst/>
+                <a:uFillTx/>
+                <a:latin typeface="Calibri"/>
+              </a:rPr>
+              <a:t/>
+            </a:r>
+            <a:r>
+              <a:rPr lang="en-US" sz="3200" b="0" u="none" strike="noStrike" dirty="0">
+                <a:solidFill>
+                  <a:schemeClr val="dk1"/>
+                </a:solidFill>
+                <a:effectLst/>
+                <a:uFillTx/>
+                <a:latin typeface="Calibri"/>
+              </a:rPr>
+              <a:t/>
+            </a:r>
+          </a:p>
+          <a:p>
+            <a:pPr marL="343080" indent="-343080" algn="l" defTabSz="457200">
+              <a:lnSpc>
+                <a:spcPct val="100000"/>
+              </a:lnSpc>
+              <a:spcBef>
+                <a:spcPts val="641"/>
+              </a:spcBef>
+              <a:buClr>
+                <a:srgbClr val="000000"/>
+              </a:buClr>
+              <a:buSzPct val="45000"/>
+              <a:buFont typeface="Wingdings" charset="2"/>
+              <a:buChar char=""/>
+              <a:tabLst>
+                <a:tab pos="0" algn="l"/>
+              </a:tabLst>
+            </a:pPr>
+            <a:r>
+              <a:rPr lang="en-US" sz="2600" b="1" u="none" strike="noStrike" dirty="0">
+                <a:solidFill>
+                  <a:schemeClr val="tx2"/>
+                </a:solidFill>
+                <a:effectLst/>
+                <a:uFillTx/>
+                <a:latin typeface="Calibri"/>
+              </a:rPr>
+              <a:t>REQ-015 — Suporte a orçamentos de Pessoa Física (PF/CPF)</a:t>
+            </a:r>
+            <a:r>
+              <a:rPr lang="en-US" sz="2600" b="1" u="none" strike="noStrike" dirty="0" err="1">
+                <a:solidFill>
+                  <a:schemeClr val="tx2"/>
+                </a:solidFill>
+                <a:effectLst/>
+                <a:uFillTx/>
+                <a:latin typeface="Calibri"/>
+              </a:rPr>
+              <a:t/>
+            </a:r>
+            <a:r>
+              <a:rPr lang="en-US" sz="2600" b="1" u="none" strike="noStrike" dirty="0">
+                <a:solidFill>
+                  <a:schemeClr val="tx2"/>
+                </a:solidFill>
+                <a:effectLst/>
+                <a:uFillTx/>
+                <a:latin typeface="Calibri"/>
+              </a:rPr>
+              <a:t/>
+            </a:r>
+          </a:p>
+          <a:p>
+            <a:pPr marL="540000" lvl="1" algn="l" defTabSz="457200">
+              <a:lnSpc>
+                <a:spcPct val="100000"/>
+              </a:lnSpc>
+              <a:spcBef>
+                <a:spcPts val="561"/>
+              </a:spcBef>
+              <a:buClr>
+                <a:srgbClr val="000000"/>
+              </a:buClr>
+              <a:buSzPct val="45000"/>
+              <a:tabLst>
+                <a:tab pos="0" algn="l"/>
+              </a:tabLst>
+            </a:pPr>
+            <a:r>
+              <a:rPr lang="en-US" sz="2600" b="1" u="none" strike="noStrike" dirty="0" err="1">
+                <a:solidFill>
+                  <a:schemeClr val="dk1"/>
+                </a:solidFill>
+                <a:effectLst/>
+                <a:uFillTx/>
+                <a:latin typeface="Calibri"/>
+                <a:ea typeface="Microsoft YaHei"/>
+              </a:rPr>
+              <a:t>Requisitos</a:t>
+            </a:r>
+            <a:r>
+              <a:rPr lang="en-US" sz="2600" b="1" u="none" strike="noStrike" dirty="0">
+                <a:solidFill>
+                  <a:schemeClr val="dk1"/>
+                </a:solidFill>
+                <a:effectLst/>
+                <a:uFillTx/>
+                <a:latin typeface="Calibri"/>
+                <a:ea typeface="Microsoft YaHei"/>
+              </a:rPr>
+              <a:t> </a:t>
+            </a:r>
+            <a:r>
+              <a:rPr lang="en-US" sz="2600" b="1" u="none" strike="noStrike" dirty="0" err="1">
+                <a:solidFill>
+                  <a:schemeClr val="dk1"/>
+                </a:solidFill>
+                <a:effectLst/>
+                <a:uFillTx/>
+                <a:latin typeface="Calibri"/>
+                <a:ea typeface="Microsoft YaHei"/>
+              </a:rPr>
+              <a:t>envolvidos</a:t>
+            </a:r>
+            <a:r>
+              <a:rPr lang="en-US" sz="2600" b="0" u="none" strike="noStrike" dirty="0">
+                <a:solidFill>
+                  <a:schemeClr val="dk1"/>
+                </a:solidFill>
+                <a:effectLst/>
+                <a:uFillTx/>
+                <a:latin typeface="Calibri"/>
+                <a:ea typeface="Microsoft YaHei"/>
+              </a:rPr>
+              <a:t>: REQ-015, REQ-001, REQ-002</a:t>
+            </a:r>
+            <a:r>
+              <a:rPr lang="en-US" sz="2600" b="0" u="none" strike="noStrike" dirty="0" err="1">
+                <a:solidFill>
+                  <a:schemeClr val="dk1"/>
+                </a:solidFill>
+                <a:effectLst/>
+                <a:uFillTx/>
+                <a:latin typeface="Calibri"/>
+                <a:ea typeface="Microsoft YaHei"/>
+              </a:rPr>
+              <a:t/>
+            </a:r>
+            <a:r>
+              <a:rPr lang="en-US" sz="2600" dirty="0" err="1">
+                <a:solidFill>
+                  <a:schemeClr val="dk1"/>
+                </a:solidFill>
+                <a:latin typeface="Calibri"/>
+                <a:ea typeface="Microsoft YaHei"/>
+              </a:rPr>
+              <a:t/>
+            </a:r>
+            <a:r>
+              <a:rPr lang="en-US" sz="2600" b="0" u="none" strike="noStrike" dirty="0">
+                <a:solidFill>
+                  <a:schemeClr val="dk1"/>
+                </a:solidFill>
+                <a:effectLst/>
+                <a:uFillTx/>
+                <a:latin typeface="Calibri"/>
+                <a:ea typeface="Microsoft YaHei"/>
+              </a:rPr>
+              <a:t/>
+            </a:r>
+          </a:p>
+          <a:p>
+            <a:pPr marL="540000" lvl="1" algn="l" defTabSz="457200">
+              <a:lnSpc>
+                <a:spcPct val="100000"/>
+              </a:lnSpc>
+              <a:spcBef>
+                <a:spcPts val="561"/>
+              </a:spcBef>
+              <a:buClr>
+                <a:srgbClr val="000000"/>
+              </a:buClr>
+              <a:buSzPct val="45000"/>
+              <a:tabLst>
+                <a:tab pos="0" algn="l"/>
+              </a:tabLst>
+            </a:pPr>
+            <a:endParaRPr lang="en-US" sz="1100" dirty="0">
+              <a:solidFill>
+                <a:schemeClr val="dk1"/>
+              </a:solidFill>
+              <a:latin typeface="Calibri"/>
+              <a:ea typeface="Microsoft YaHei"/>
+            </a:endParaRPr>
+          </a:p>
+          <a:p>
+            <a:pPr marL="540000" lvl="1" algn="l" defTabSz="457200">
+              <a:lnSpc>
+                <a:spcPct val="100000"/>
+              </a:lnSpc>
+              <a:spcBef>
+                <a:spcPts val="561"/>
+              </a:spcBef>
+              <a:buClr>
+                <a:srgbClr val="000000"/>
+              </a:buClr>
+              <a:buSzPct val="45000"/>
+              <a:tabLst>
+                <a:tab pos="0" algn="l"/>
+              </a:tabLst>
+            </a:pPr>
+            <a:r>
+              <a:rPr lang="en-US" sz="2600" b="1" dirty="0" err="1">
+                <a:solidFill>
+                  <a:schemeClr val="dk1"/>
+                </a:solidFill>
+                <a:latin typeface="Calibri"/>
+                <a:ea typeface="Microsoft YaHei"/>
+              </a:rPr>
+              <a:t>Porcentagem</a:t>
+            </a:r>
+            <a:r>
+              <a:rPr lang="en-US" sz="2600" b="1" dirty="0">
+                <a:solidFill>
+                  <a:schemeClr val="dk1"/>
+                </a:solidFill>
+                <a:latin typeface="Calibri"/>
+                <a:ea typeface="Microsoft YaHei"/>
+              </a:rPr>
+              <a:t> de </a:t>
+            </a:r>
+            <a:r>
+              <a:rPr lang="en-US" sz="2600" b="1" dirty="0" err="1">
+                <a:solidFill>
+                  <a:schemeClr val="dk1"/>
+                </a:solidFill>
+                <a:latin typeface="Calibri"/>
+                <a:ea typeface="Microsoft YaHei"/>
+              </a:rPr>
+              <a:t>cobertura</a:t>
+            </a:r>
+            <a:r>
+              <a:rPr lang="en-US" sz="2600" b="1" dirty="0">
+                <a:solidFill>
+                  <a:schemeClr val="dk1"/>
+                </a:solidFill>
+                <a:latin typeface="Calibri"/>
+                <a:ea typeface="Microsoft YaHei"/>
+              </a:rPr>
+              <a:t> </a:t>
+            </a:r>
+            <a:r>
+              <a:rPr lang="en-US" sz="2600" b="1" dirty="0" err="1">
+                <a:solidFill>
+                  <a:schemeClr val="dk1"/>
+                </a:solidFill>
+                <a:latin typeface="Calibri"/>
+                <a:ea typeface="Microsoft YaHei"/>
+              </a:rPr>
+              <a:t>por</a:t>
+            </a:r>
+            <a:r>
+              <a:rPr lang="en-US" sz="2600" b="1" dirty="0">
+                <a:solidFill>
+                  <a:schemeClr val="dk1"/>
+                </a:solidFill>
+                <a:latin typeface="Calibri"/>
+                <a:ea typeface="Microsoft YaHei"/>
+              </a:rPr>
+              <a:t> </a:t>
+            </a:r>
+            <a:r>
+              <a:rPr lang="en-US" sz="2600" b="1" dirty="0" err="1">
+                <a:solidFill>
+                  <a:schemeClr val="dk1"/>
+                </a:solidFill>
+                <a:latin typeface="Calibri"/>
+                <a:ea typeface="Microsoft YaHei"/>
+              </a:rPr>
+              <a:t>requisito</a:t>
+            </a:r>
+            <a:r>
+              <a:rPr lang="en-US" sz="2600" dirty="0">
+                <a:solidFill>
+                  <a:schemeClr val="dk1"/>
+                </a:solidFill>
+                <a:latin typeface="Calibri"/>
+                <a:ea typeface="Microsoft YaHei"/>
+              </a:rPr>
+              <a:t>:</a:t>
+            </a:r>
+            <a:endParaRPr lang="en-US" sz="2600" b="0" u="none" strike="noStrike" dirty="0">
+              <a:solidFill>
+                <a:schemeClr val="dk1"/>
+              </a:solidFill>
+              <a:effectLst/>
+              <a:uFillTx/>
+              <a:latin typeface="Calibri"/>
+            </a:endParaRPr>
+          </a:p>
+          <a:p>
+            <a:pPr marL="864000" lvl="1" indent="-324000" algn="l" defTabSz="457200">
+              <a:lnSpc>
+                <a:spcPct val="100000"/>
+              </a:lnSpc>
+              <a:spcBef>
+                <a:spcPts val="561"/>
+              </a:spcBef>
+              <a:buClr>
+                <a:srgbClr val="000000"/>
+              </a:buClr>
+              <a:buSzPct val="45000"/>
+              <a:buFont typeface="Wingdings" charset="2"/>
+              <a:buChar char=""/>
+              <a:tabLst>
+                <a:tab pos="0" algn="l"/>
+              </a:tabLst>
+            </a:pPr>
+            <a:r>
+              <a:rPr lang="en-US" sz="2600" b="0" u="none" strike="noStrike" dirty="0">
+                <a:solidFill>
+                  <a:schemeClr val="dk1"/>
+                </a:solidFill>
+                <a:effectLst/>
+                <a:uFillTx/>
+                <a:latin typeface="Calibri"/>
+                <a:ea typeface="Microsoft YaHei"/>
+              </a:rPr>
+              <a:t>REQ-015: antes 0%, depois ~50%, delta +50</a:t>
+            </a:r>
+            <a:r>
+              <a:rPr lang="en-US" sz="2600" b="0" u="none" strike="noStrike" dirty="0" err="1">
+                <a:solidFill>
+                  <a:schemeClr val="dk1"/>
+                </a:solidFill>
+                <a:effectLst/>
+                <a:uFillTx/>
+                <a:latin typeface="Calibri"/>
+                <a:ea typeface="Microsoft YaHei"/>
+              </a:rPr>
+              <a:t/>
+            </a:r>
+            <a:r>
+              <a:rPr lang="en-US" sz="2600" dirty="0" err="1">
+                <a:solidFill>
+                  <a:schemeClr val="dk1"/>
+                </a:solidFill>
+                <a:latin typeface="Calibri"/>
+                <a:ea typeface="Microsoft YaHei"/>
+              </a:rPr>
+              <a:t/>
+            </a:r>
+            <a:r>
+              <a:rPr lang="en-US" sz="2600" b="0" u="none" strike="noStrike" dirty="0" err="1">
+                <a:solidFill>
+                  <a:schemeClr val="dk1"/>
+                </a:solidFill>
+                <a:effectLst/>
+                <a:uFillTx/>
+                <a:latin typeface="Calibri"/>
+                <a:ea typeface="Microsoft YaHei"/>
+              </a:rPr>
+              <a:t/>
+            </a:r>
+            <a:r>
+              <a:rPr lang="en-US" sz="2600" b="0" u="none" strike="noStrike" dirty="0">
+                <a:solidFill>
+                  <a:schemeClr val="dk1"/>
+                </a:solidFill>
+                <a:effectLst/>
+                <a:uFillTx/>
+                <a:latin typeface="Calibri"/>
+                <a:ea typeface="Microsoft YaHei"/>
+              </a:rPr>
+              <a:t/>
+            </a:r>
+            <a:endParaRPr lang="en-US" sz="2600" b="0" u="none" strike="noStrike" dirty="0">
+              <a:solidFill>
+                <a:schemeClr val="dk1"/>
+              </a:solidFill>
+              <a:effectLst/>
+              <a:uFillTx/>
+              <a:latin typeface="Calibri"/>
+            </a:endParaRPr>
+          </a:p>
+          <a:p>
+            <a:pPr marL="864000" lvl="1" indent="-324000" algn="l" defTabSz="457200">
+              <a:lnSpc>
+                <a:spcPct val="100000"/>
+              </a:lnSpc>
+              <a:spcBef>
+                <a:spcPts val="561"/>
+              </a:spcBef>
+              <a:buClr>
+                <a:srgbClr val="000000"/>
+              </a:buClr>
+              <a:buSzPct val="45000"/>
+              <a:buFont typeface="Wingdings" charset="2"/>
+              <a:buChar char=""/>
+              <a:tabLst>
+                <a:tab pos="0" algn="l"/>
+              </a:tabLst>
+            </a:pPr>
+            <a:r>
+              <a:rPr lang="en-US" sz="2600" b="0" u="none" strike="noStrike" dirty="0">
+                <a:solidFill>
+                  <a:schemeClr val="dk1"/>
+                </a:solidFill>
+                <a:effectLst/>
+                <a:uFillTx/>
+                <a:latin typeface="Calibri"/>
+                <a:ea typeface="Microsoft YaHei"/>
+              </a:rPr>
+              <a:t>REQ-001: antes ~40%, depois ~45%, delta +5</a:t>
+            </a:r>
+            <a:r>
+              <a:rPr lang="en-US" sz="2600" b="0" u="none" strike="noStrike" dirty="0" err="1">
+                <a:solidFill>
+                  <a:schemeClr val="dk1"/>
+                </a:solidFill>
+                <a:effectLst/>
+                <a:uFillTx/>
+                <a:latin typeface="Calibri"/>
+                <a:ea typeface="Microsoft YaHei"/>
+              </a:rPr>
+              <a:t/>
+            </a:r>
+            <a:r>
+              <a:rPr lang="en-US" sz="2600" dirty="0" err="1">
+                <a:solidFill>
+                  <a:schemeClr val="dk1"/>
+                </a:solidFill>
+                <a:latin typeface="Calibri"/>
+                <a:ea typeface="Microsoft YaHei"/>
+              </a:rPr>
+              <a:t/>
+            </a:r>
+            <a:r>
+              <a:rPr lang="en-US" sz="2600" b="0" u="none" strike="noStrike" dirty="0" err="1">
+                <a:solidFill>
+                  <a:schemeClr val="dk1"/>
+                </a:solidFill>
+                <a:effectLst/>
+                <a:uFillTx/>
+                <a:latin typeface="Calibri"/>
+                <a:ea typeface="Microsoft YaHei"/>
+              </a:rPr>
+              <a:t/>
+            </a:r>
+            <a:r>
+              <a:rPr lang="en-US" sz="2600" b="0" u="none" strike="noStrike" dirty="0">
+                <a:solidFill>
+                  <a:schemeClr val="dk1"/>
+                </a:solidFill>
+                <a:effectLst/>
+                <a:uFillTx/>
+                <a:latin typeface="Calibri"/>
+                <a:ea typeface="Microsoft YaHei"/>
+              </a:rPr>
+              <a:t/>
+            </a:r>
+            <a:endParaRPr lang="en-US" sz="2600" b="0" u="none" strike="noStrike" dirty="0">
+              <a:solidFill>
+                <a:schemeClr val="dk1"/>
+              </a:solidFill>
+              <a:effectLst/>
+              <a:uFillTx/>
+              <a:latin typeface="Calibri"/>
+            </a:endParaRPr>
+          </a:p>
+          <a:p>
+            <a:pPr marL="864000" lvl="1" indent="-324000" algn="l" defTabSz="457200">
+              <a:lnSpc>
+                <a:spcPct val="100000"/>
+              </a:lnSpc>
+              <a:spcBef>
+                <a:spcPts val="561"/>
+              </a:spcBef>
+              <a:buClr>
+                <a:srgbClr val="000000"/>
+              </a:buClr>
+              <a:buSzPct val="45000"/>
+              <a:buFont typeface="Wingdings" charset="2"/>
+              <a:buChar char=""/>
+              <a:tabLst>
+                <a:tab pos="0" algn="l"/>
+              </a:tabLst>
+            </a:pPr>
+            <a:r>
+              <a:rPr lang="en-US" sz="2600" b="0" u="none" strike="noStrike" dirty="0">
+                <a:solidFill>
+                  <a:schemeClr val="dk1"/>
+                </a:solidFill>
+                <a:effectLst/>
+                <a:uFillTx/>
+                <a:latin typeface="Calibri"/>
+                <a:ea typeface="Microsoft YaHei"/>
+              </a:rPr>
+              <a:t>REQ-002: antes ~25%, depois ~30%, delta +5</a:t>
+            </a:r>
+            <a:r>
+              <a:rPr lang="en-US" sz="2600" b="0" u="none" strike="noStrike" dirty="0" err="1">
+                <a:solidFill>
+                  <a:schemeClr val="dk1"/>
+                </a:solidFill>
+                <a:effectLst/>
+                <a:uFillTx/>
+                <a:latin typeface="Calibri"/>
+                <a:ea typeface="Microsoft YaHei"/>
+              </a:rPr>
+              <a:t/>
+            </a:r>
+            <a:r>
+              <a:rPr lang="en-US" sz="2600" dirty="0" err="1">
+                <a:solidFill>
+                  <a:schemeClr val="dk1"/>
+                </a:solidFill>
+                <a:latin typeface="Calibri"/>
+                <a:ea typeface="Microsoft YaHei"/>
+              </a:rPr>
+              <a:t/>
+            </a:r>
+            <a:r>
+              <a:rPr lang="en-US" sz="2600" b="0" u="none" strike="noStrike" dirty="0" err="1">
+                <a:solidFill>
+                  <a:schemeClr val="dk1"/>
+                </a:solidFill>
+                <a:effectLst/>
+                <a:uFillTx/>
+                <a:latin typeface="Calibri"/>
+                <a:ea typeface="Microsoft YaHei"/>
+              </a:rPr>
+              <a:t/>
+            </a:r>
+            <a:r>
+              <a:rPr lang="en-US" sz="2600" b="0" u="none" strike="noStrike" dirty="0">
+                <a:solidFill>
+                  <a:schemeClr val="dk1"/>
+                </a:solidFill>
+                <a:effectLst/>
+                <a:uFillTx/>
+                <a:latin typeface="Calibri"/>
+                <a:ea typeface="Microsoft YaHei"/>
+              </a:rPr>
+              <a:t/>
+            </a:r>
+            <a:endParaRPr lang="en-US" sz="2600" b="0" u="none" strike="noStrike" dirty="0">
+              <a:solidFill>
+                <a:schemeClr val="dk1"/>
+              </a:solidFill>
+              <a:effectLst/>
+              <a:uFillTx/>
+              <a:latin typeface="Calibri"/>
+            </a:endParaRPr>
+          </a:p>
+        </p:txBody>
+      </p:sp>
+      <p:pic>
+        <p:nvPicPr>
+          <p:cNvPr id="72" name="Imagem 71"/>
+          <p:cNvPicPr/>
+          <p:nvPr/>
+        </p:nvPicPr>
+        <p:blipFill>
+          <a:blip r:embed="rId2"/>
+          <a:stretch/>
+        </p:blipFill>
+        <p:spPr>
+          <a:xfrm>
+            <a:off x="720" y="-28800"/>
+            <a:ext cx="9142560" cy="1647720"/>
+          </a:xfrm>
+          <a:prstGeom prst="rect">
+            <a:avLst/>
+          </a:prstGeom>
+          <a:noFill/>
+          <a:ln w="0">
+            <a:noFill/>
+          </a:ln>
+        </p:spPr>
+      </p:pic>
+      <p:sp>
+        <p:nvSpPr>
+          <p:cNvPr id="73" name="Title 3"/>
+          <p:cNvSpPr/>
+          <p:nvPr/>
+        </p:nvSpPr>
+        <p:spPr>
+          <a:xfrm>
+            <a:off x="915480" y="180000"/>
+            <a:ext cx="8228160" cy="1141560"/>
+          </a:xfrm>
+          <a:prstGeom prst="rect">
+            <a:avLst/>
+          </a:prstGeom>
+          <a:noFill/>
+          <a:ln w="0">
+            <a:noFill/>
+          </a:ln>
+        </p:spPr>
+        <p:style>
+          <a:lnRef idx="0">
+            <a:scrgbClr r="0" g="0" b="0"/>
+          </a:lnRef>
+          <a:fillRef idx="0">
+            <a:scrgbClr r="0" g="0" b="0"/>
+          </a:fillRef>
+          <a:effectRef idx="0">
+            <a:scrgbClr r="0" g="0" b="0"/>
+          </a:effectRef>
+          <a:fontRef idx="minor"/>
+        </p:style>
+        <p:txBody>
+          <a:bodyPr lIns="90000" tIns="45000" rIns="90000" bIns="45000" anchor="ctr">
+            <a:noAutofit/>
+          </a:bodyPr>
+          <a:lstStyle/>
+          <a:p>
+            <a:pPr algn="ctr" defTabSz="457200">
+              <a:lnSpc>
+                <a:spcPct val="100000"/>
+              </a:lnSpc>
+            </a:pPr>
+            <a:r>
+              <a:rPr lang="en-US" sz="4400" b="0" u="none" strike="noStrike">
+                <a:solidFill>
+                  <a:srgbClr val="EA7500"/>
+                </a:solidFill>
+                <a:effectLst/>
+                <a:uFillTx/>
+                <a:latin typeface="Calibri"/>
+              </a:rPr>
+              <a:t>Realizações da Sprint</a:t>
+            </a:r>
+            <a:endParaRPr lang="pt-BR" sz="4400" b="0" u="none" strike="noStrike">
+              <a:solidFill>
+                <a:srgbClr val="000000"/>
+              </a:solidFill>
+              <a:effectLst/>
+              <a:uFillTx/>
+              <a:latin typeface="Arial"/>
+            </a:endParaRPr>
+          </a:p>
+        </p:txBody>
+      </p:sp>
+    </p:spTree>
+  </p:cSld>
+  <p:clrMapOvr>
+    <a:masterClrMapping/>
+  </p:clrMapOvr>
+</p:sld>
+</file>
+
+<file path=ppt/slides/slide35.xml><?xml version="1.0" encoding="utf-8"?>
+<p:sld xmlns:a="http://schemas.openxmlformats.org/drawingml/2006/main" xmlns:p="http://schemas.openxmlformats.org/presentationml/2006/main" xmlns:r="http://schemas.openxmlformats.org/officeDocument/2006/relationships">
+  <p:cSld>
+    <p:spTree>
+      <p:nvGrpSpPr>
+        <p:cNvPr id="1" name=""/>
+        <p:cNvGrpSpPr/>
+        <p:nvPr/>
+      </p:nvGrpSpPr>
+      <p:grpSpPr/>
+      <p:sp>
+        <p:nvSpPr>
+          <p:cNvPr id="71" name="PlaceHolder 1"/>
+          <p:cNvSpPr>
+            <a:spLocks noGrp="1"/>
+          </p:cNvSpPr>
+          <p:nvPr>
+            <p:ph/>
+          </p:nvPr>
+        </p:nvSpPr>
+        <p:spPr>
+          <a:xfrm>
+            <a:off x="411120" y="1321560"/>
+            <a:ext cx="8228160" cy="4637520"/>
+          </a:xfrm>
+          <a:prstGeom prst="rect">
+            <a:avLst/>
+          </a:prstGeom>
+          <a:noFill/>
+          <a:ln w="0">
+            <a:noFill/>
+          </a:ln>
+        </p:spPr>
+        <p:txBody>
+          <a:bodyPr lIns="91440" tIns="45720" rIns="91440" bIns="45720" anchor="t">
+            <a:noAutofit/>
+          </a:bodyPr>
+          <a:lstStyle/>
+          <a:p>
+            <a:pPr indent="0" algn="l" defTabSz="457200">
+              <a:lnSpc>
+                <a:spcPct val="100000"/>
+              </a:lnSpc>
+              <a:spcBef>
+                <a:spcPts val="641"/>
+              </a:spcBef>
+              <a:buNone/>
+              <a:tabLst>
+                <a:tab pos="0" algn="l"/>
+              </a:tabLst>
+            </a:pPr>
+            <a:endParaRPr lang="en-US" sz="3200" b="0" u="none" strike="noStrike" dirty="0">
+              <a:solidFill>
+                <a:schemeClr val="dk1"/>
+              </a:solidFill>
+              <a:effectLst/>
+              <a:uFillTx/>
+              <a:latin typeface="Calibri"/>
+            </a:endParaRPr>
+          </a:p>
+          <a:p>
+            <a:pPr marL="343080" indent="0" algn="l" defTabSz="457200">
+              <a:lnSpc>
+                <a:spcPct val="100000"/>
+              </a:lnSpc>
+              <a:spcBef>
+                <a:spcPts val="641"/>
+              </a:spcBef>
+              <a:buNone/>
+              <a:tabLst>
+                <a:tab pos="0" algn="l"/>
+              </a:tabLst>
+            </a:pPr>
+            <a:r>
+              <a:rPr lang="en-US" sz="3200" b="0" u="none" strike="noStrike" dirty="0">
+                <a:solidFill>
+                  <a:schemeClr val="dk1"/>
+                </a:solidFill>
+                <a:effectLst/>
+                <a:uFillTx/>
+                <a:latin typeface="Calibri"/>
+              </a:rPr>
+              <a:t/>
+            </a:r>
+            <a:r>
+              <a:rPr lang="en-US" sz="3200" b="0" u="none" strike="noStrike" dirty="0" err="1">
+                <a:solidFill>
+                  <a:schemeClr val="dk1"/>
+                </a:solidFill>
+                <a:effectLst/>
+                <a:uFillTx/>
+                <a:latin typeface="Calibri"/>
+              </a:rPr>
+              <a:t/>
+            </a:r>
+            <a:r>
+              <a:rPr lang="en-US" sz="3200" b="0" u="none" strike="noStrike" dirty="0">
+                <a:solidFill>
+                  <a:schemeClr val="dk1"/>
+                </a:solidFill>
+                <a:effectLst/>
+                <a:uFillTx/>
+                <a:latin typeface="Calibri"/>
+              </a:rPr>
+              <a:t/>
+            </a:r>
+          </a:p>
+          <a:p>
+            <a:pPr marL="343080" indent="-343080" algn="l" defTabSz="457200">
+              <a:lnSpc>
+                <a:spcPct val="100000"/>
+              </a:lnSpc>
+              <a:spcBef>
+                <a:spcPts val="641"/>
+              </a:spcBef>
+              <a:buClr>
+                <a:srgbClr val="000000"/>
+              </a:buClr>
+              <a:buSzPct val="45000"/>
+              <a:buFont typeface="Wingdings" charset="2"/>
+              <a:buChar char=""/>
+              <a:tabLst>
+                <a:tab pos="0" algn="l"/>
+              </a:tabLst>
+            </a:pPr>
+            <a:r>
+              <a:rPr lang="en-US" sz="2600" b="1" u="none" strike="noStrike" dirty="0">
+                <a:solidFill>
+                  <a:schemeClr val="tx2"/>
+                </a:solidFill>
+                <a:effectLst/>
+                <a:uFillTx/>
+                <a:latin typeface="Calibri"/>
+              </a:rPr>
+              <a:t>REQ-016 — Migração terminológica e estrutural Negociação → Atendimento (parcial)</a:t>
+            </a:r>
+            <a:r>
+              <a:rPr lang="en-US" sz="2600" b="1" u="none" strike="noStrike" dirty="0" err="1">
+                <a:solidFill>
+                  <a:schemeClr val="tx2"/>
+                </a:solidFill>
+                <a:effectLst/>
+                <a:uFillTx/>
+                <a:latin typeface="Calibri"/>
+              </a:rPr>
+              <a:t/>
+            </a:r>
+            <a:r>
+              <a:rPr lang="en-US" sz="2600" b="1" u="none" strike="noStrike" dirty="0">
+                <a:solidFill>
+                  <a:schemeClr val="tx2"/>
+                </a:solidFill>
+                <a:effectLst/>
+                <a:uFillTx/>
+                <a:latin typeface="Calibri"/>
+              </a:rPr>
+              <a:t/>
+            </a:r>
+          </a:p>
+          <a:p>
+            <a:pPr marL="540000" lvl="1" algn="l" defTabSz="457200">
+              <a:lnSpc>
+                <a:spcPct val="100000"/>
+              </a:lnSpc>
+              <a:spcBef>
+                <a:spcPts val="561"/>
+              </a:spcBef>
+              <a:buClr>
+                <a:srgbClr val="000000"/>
+              </a:buClr>
+              <a:buSzPct val="45000"/>
+              <a:tabLst>
+                <a:tab pos="0" algn="l"/>
+              </a:tabLst>
+            </a:pPr>
+            <a:r>
+              <a:rPr lang="en-US" sz="2600" b="1" u="none" strike="noStrike" dirty="0" err="1">
+                <a:solidFill>
+                  <a:schemeClr val="dk1"/>
+                </a:solidFill>
+                <a:effectLst/>
+                <a:uFillTx/>
+                <a:latin typeface="Calibri"/>
+                <a:ea typeface="Microsoft YaHei"/>
+              </a:rPr>
+              <a:t>Requisitos</a:t>
+            </a:r>
+            <a:r>
+              <a:rPr lang="en-US" sz="2600" b="1" u="none" strike="noStrike" dirty="0">
+                <a:solidFill>
+                  <a:schemeClr val="dk1"/>
+                </a:solidFill>
+                <a:effectLst/>
+                <a:uFillTx/>
+                <a:latin typeface="Calibri"/>
+                <a:ea typeface="Microsoft YaHei"/>
+              </a:rPr>
+              <a:t> </a:t>
+            </a:r>
+            <a:r>
+              <a:rPr lang="en-US" sz="2600" b="1" u="none" strike="noStrike" dirty="0" err="1">
+                <a:solidFill>
+                  <a:schemeClr val="dk1"/>
+                </a:solidFill>
+                <a:effectLst/>
+                <a:uFillTx/>
+                <a:latin typeface="Calibri"/>
+                <a:ea typeface="Microsoft YaHei"/>
+              </a:rPr>
+              <a:t>envolvidos</a:t>
+            </a:r>
+            <a:r>
+              <a:rPr lang="en-US" sz="2600" b="0" u="none" strike="noStrike" dirty="0">
+                <a:solidFill>
+                  <a:schemeClr val="dk1"/>
+                </a:solidFill>
+                <a:effectLst/>
+                <a:uFillTx/>
+                <a:latin typeface="Calibri"/>
+                <a:ea typeface="Microsoft YaHei"/>
+              </a:rPr>
+              <a:t>: REQ-016</a:t>
+            </a:r>
+            <a:r>
+              <a:rPr lang="en-US" sz="2600" b="0" u="none" strike="noStrike" dirty="0" err="1">
+                <a:solidFill>
+                  <a:schemeClr val="dk1"/>
+                </a:solidFill>
+                <a:effectLst/>
+                <a:uFillTx/>
+                <a:latin typeface="Calibri"/>
+                <a:ea typeface="Microsoft YaHei"/>
+              </a:rPr>
+              <a:t/>
+            </a:r>
+            <a:r>
+              <a:rPr lang="en-US" sz="2600" dirty="0" err="1">
+                <a:solidFill>
+                  <a:schemeClr val="dk1"/>
+                </a:solidFill>
+                <a:latin typeface="Calibri"/>
+                <a:ea typeface="Microsoft YaHei"/>
+              </a:rPr>
+              <a:t/>
+            </a:r>
+            <a:r>
+              <a:rPr lang="en-US" sz="2600" b="0" u="none" strike="noStrike" dirty="0">
+                <a:solidFill>
+                  <a:schemeClr val="dk1"/>
+                </a:solidFill>
+                <a:effectLst/>
+                <a:uFillTx/>
+                <a:latin typeface="Calibri"/>
+                <a:ea typeface="Microsoft YaHei"/>
+              </a:rPr>
+              <a:t/>
+            </a:r>
+          </a:p>
+          <a:p>
+            <a:pPr marL="540000" lvl="1" algn="l" defTabSz="457200">
+              <a:lnSpc>
+                <a:spcPct val="100000"/>
+              </a:lnSpc>
+              <a:spcBef>
+                <a:spcPts val="561"/>
+              </a:spcBef>
+              <a:buClr>
+                <a:srgbClr val="000000"/>
+              </a:buClr>
+              <a:buSzPct val="45000"/>
+              <a:tabLst>
+                <a:tab pos="0" algn="l"/>
+              </a:tabLst>
+            </a:pPr>
+            <a:endParaRPr lang="en-US" sz="1100" dirty="0">
+              <a:solidFill>
+                <a:schemeClr val="dk1"/>
+              </a:solidFill>
+              <a:latin typeface="Calibri"/>
+              <a:ea typeface="Microsoft YaHei"/>
+            </a:endParaRPr>
+          </a:p>
+          <a:p>
+            <a:pPr marL="540000" lvl="1" algn="l" defTabSz="457200">
+              <a:lnSpc>
+                <a:spcPct val="100000"/>
+              </a:lnSpc>
+              <a:spcBef>
+                <a:spcPts val="561"/>
+              </a:spcBef>
+              <a:buClr>
+                <a:srgbClr val="000000"/>
+              </a:buClr>
+              <a:buSzPct val="45000"/>
+              <a:tabLst>
+                <a:tab pos="0" algn="l"/>
+              </a:tabLst>
+            </a:pPr>
+            <a:r>
+              <a:rPr lang="en-US" sz="2600" b="1" dirty="0" err="1">
+                <a:solidFill>
+                  <a:schemeClr val="dk1"/>
+                </a:solidFill>
+                <a:latin typeface="Calibri"/>
+                <a:ea typeface="Microsoft YaHei"/>
+              </a:rPr>
+              <a:t>Porcentagem</a:t>
+            </a:r>
+            <a:r>
+              <a:rPr lang="en-US" sz="2600" b="1" dirty="0">
+                <a:solidFill>
+                  <a:schemeClr val="dk1"/>
+                </a:solidFill>
+                <a:latin typeface="Calibri"/>
+                <a:ea typeface="Microsoft YaHei"/>
+              </a:rPr>
+              <a:t> de </a:t>
+            </a:r>
+            <a:r>
+              <a:rPr lang="en-US" sz="2600" b="1" dirty="0" err="1">
+                <a:solidFill>
+                  <a:schemeClr val="dk1"/>
+                </a:solidFill>
+                <a:latin typeface="Calibri"/>
+                <a:ea typeface="Microsoft YaHei"/>
+              </a:rPr>
+              <a:t>cobertura</a:t>
+            </a:r>
+            <a:r>
+              <a:rPr lang="en-US" sz="2600" b="1" dirty="0">
+                <a:solidFill>
+                  <a:schemeClr val="dk1"/>
+                </a:solidFill>
+                <a:latin typeface="Calibri"/>
+                <a:ea typeface="Microsoft YaHei"/>
+              </a:rPr>
+              <a:t> </a:t>
+            </a:r>
+            <a:r>
+              <a:rPr lang="en-US" sz="2600" b="1" dirty="0" err="1">
+                <a:solidFill>
+                  <a:schemeClr val="dk1"/>
+                </a:solidFill>
+                <a:latin typeface="Calibri"/>
+                <a:ea typeface="Microsoft YaHei"/>
+              </a:rPr>
+              <a:t>por</a:t>
+            </a:r>
+            <a:r>
+              <a:rPr lang="en-US" sz="2600" b="1" dirty="0">
+                <a:solidFill>
+                  <a:schemeClr val="dk1"/>
+                </a:solidFill>
+                <a:latin typeface="Calibri"/>
+                <a:ea typeface="Microsoft YaHei"/>
+              </a:rPr>
+              <a:t> </a:t>
+            </a:r>
+            <a:r>
+              <a:rPr lang="en-US" sz="2600" b="1" dirty="0" err="1">
+                <a:solidFill>
+                  <a:schemeClr val="dk1"/>
+                </a:solidFill>
+                <a:latin typeface="Calibri"/>
+                <a:ea typeface="Microsoft YaHei"/>
+              </a:rPr>
+              <a:t>requisito</a:t>
+            </a:r>
+            <a:r>
+              <a:rPr lang="en-US" sz="2600" dirty="0">
+                <a:solidFill>
+                  <a:schemeClr val="dk1"/>
+                </a:solidFill>
+                <a:latin typeface="Calibri"/>
+                <a:ea typeface="Microsoft YaHei"/>
+              </a:rPr>
+              <a:t>:</a:t>
+            </a:r>
+            <a:endParaRPr lang="en-US" sz="2600" b="0" u="none" strike="noStrike" dirty="0">
+              <a:solidFill>
+                <a:schemeClr val="dk1"/>
+              </a:solidFill>
+              <a:effectLst/>
+              <a:uFillTx/>
+              <a:latin typeface="Calibri"/>
+            </a:endParaRPr>
+          </a:p>
+          <a:p>
+            <a:pPr marL="864000" lvl="1" indent="-324000" algn="l" defTabSz="457200">
+              <a:lnSpc>
+                <a:spcPct val="100000"/>
+              </a:lnSpc>
+              <a:spcBef>
+                <a:spcPts val="561"/>
+              </a:spcBef>
+              <a:buClr>
+                <a:srgbClr val="000000"/>
+              </a:buClr>
+              <a:buSzPct val="45000"/>
+              <a:buFont typeface="Wingdings" charset="2"/>
+              <a:buChar char=""/>
+              <a:tabLst>
+                <a:tab pos="0" algn="l"/>
+              </a:tabLst>
+            </a:pPr>
+            <a:r>
+              <a:rPr lang="en-US" sz="2600" b="0" u="none" strike="noStrike" dirty="0">
+                <a:solidFill>
+                  <a:schemeClr val="dk1"/>
+                </a:solidFill>
+                <a:effectLst/>
+                <a:uFillTx/>
+                <a:latin typeface="Calibri"/>
+                <a:ea typeface="Microsoft YaHei"/>
+              </a:rPr>
+              <a:t>REQ-016: antes 0%, depois ~40%, delta +40</a:t>
+            </a:r>
+            <a:r>
+              <a:rPr lang="en-US" sz="2600" b="0" u="none" strike="noStrike" dirty="0" err="1">
+                <a:solidFill>
+                  <a:schemeClr val="dk1"/>
+                </a:solidFill>
+                <a:effectLst/>
+                <a:uFillTx/>
+                <a:latin typeface="Calibri"/>
+                <a:ea typeface="Microsoft YaHei"/>
+              </a:rPr>
+              <a:t/>
+            </a:r>
+            <a:r>
+              <a:rPr lang="en-US" sz="2600" dirty="0" err="1">
+                <a:solidFill>
+                  <a:schemeClr val="dk1"/>
+                </a:solidFill>
+                <a:latin typeface="Calibri"/>
+                <a:ea typeface="Microsoft YaHei"/>
+              </a:rPr>
+              <a:t/>
+            </a:r>
+            <a:r>
+              <a:rPr lang="en-US" sz="2600" b="0" u="none" strike="noStrike" dirty="0" err="1">
+                <a:solidFill>
+                  <a:schemeClr val="dk1"/>
+                </a:solidFill>
+                <a:effectLst/>
+                <a:uFillTx/>
+                <a:latin typeface="Calibri"/>
+                <a:ea typeface="Microsoft YaHei"/>
+              </a:rPr>
+              <a:t/>
+            </a:r>
+            <a:r>
+              <a:rPr lang="en-US" sz="2600" b="0" u="none" strike="noStrike" dirty="0">
+                <a:solidFill>
+                  <a:schemeClr val="dk1"/>
+                </a:solidFill>
+                <a:effectLst/>
+                <a:uFillTx/>
+                <a:latin typeface="Calibri"/>
+                <a:ea typeface="Microsoft YaHei"/>
+              </a:rPr>
+              <a:t/>
+            </a:r>
+            <a:endParaRPr lang="en-US" sz="2600" b="0" u="none" strike="noStrike" dirty="0">
+              <a:solidFill>
+                <a:schemeClr val="dk1"/>
+              </a:solidFill>
+              <a:effectLst/>
+              <a:uFillTx/>
+              <a:latin typeface="Calibri"/>
+            </a:endParaRPr>
+          </a:p>
+        </p:txBody>
+      </p:sp>
+      <p:pic>
+        <p:nvPicPr>
+          <p:cNvPr id="72" name="Imagem 71"/>
+          <p:cNvPicPr/>
+          <p:nvPr/>
+        </p:nvPicPr>
+        <p:blipFill>
+          <a:blip r:embed="rId2"/>
+          <a:stretch/>
+        </p:blipFill>
+        <p:spPr>
+          <a:xfrm>
+            <a:off x="720" y="-28800"/>
+            <a:ext cx="9142560" cy="1647720"/>
+          </a:xfrm>
+          <a:prstGeom prst="rect">
+            <a:avLst/>
+          </a:prstGeom>
+          <a:noFill/>
+          <a:ln w="0">
+            <a:noFill/>
+          </a:ln>
+        </p:spPr>
+      </p:pic>
+      <p:sp>
+        <p:nvSpPr>
+          <p:cNvPr id="73" name="Title 3"/>
+          <p:cNvSpPr/>
+          <p:nvPr/>
+        </p:nvSpPr>
+        <p:spPr>
+          <a:xfrm>
+            <a:off x="915480" y="180000"/>
+            <a:ext cx="8228160" cy="1141560"/>
+          </a:xfrm>
+          <a:prstGeom prst="rect">
+            <a:avLst/>
+          </a:prstGeom>
+          <a:noFill/>
+          <a:ln w="0">
+            <a:noFill/>
+          </a:ln>
+        </p:spPr>
+        <p:style>
+          <a:lnRef idx="0">
+            <a:scrgbClr r="0" g="0" b="0"/>
+          </a:lnRef>
+          <a:fillRef idx="0">
+            <a:scrgbClr r="0" g="0" b="0"/>
+          </a:fillRef>
+          <a:effectRef idx="0">
+            <a:scrgbClr r="0" g="0" b="0"/>
+          </a:effectRef>
+          <a:fontRef idx="minor"/>
+        </p:style>
+        <p:txBody>
+          <a:bodyPr lIns="90000" tIns="45000" rIns="90000" bIns="45000" anchor="ctr">
+            <a:noAutofit/>
+          </a:bodyPr>
+          <a:lstStyle/>
+          <a:p>
+            <a:pPr algn="ctr" defTabSz="457200">
+              <a:lnSpc>
+                <a:spcPct val="100000"/>
+              </a:lnSpc>
+            </a:pPr>
+            <a:r>
+              <a:rPr lang="en-US" sz="4400" b="0" u="none" strike="noStrike">
+                <a:solidFill>
+                  <a:srgbClr val="EA7500"/>
+                </a:solidFill>
+                <a:effectLst/>
+                <a:uFillTx/>
+                <a:latin typeface="Calibri"/>
+              </a:rPr>
+              <a:t>Realizações da Sprint</a:t>
+            </a:r>
+            <a:endParaRPr lang="pt-BR" sz="4400" b="0" u="none" strike="noStrike">
+              <a:solidFill>
+                <a:srgbClr val="000000"/>
+              </a:solidFill>
+              <a:effectLst/>
+              <a:uFillTx/>
+              <a:latin typeface="Arial"/>
+            </a:endParaRPr>
+          </a:p>
+        </p:txBody>
+      </p:sp>
+    </p:spTree>
+  </p:cSld>
+  <p:clrMapOvr>
+    <a:masterClrMapping/>
+  </p:clrMapOvr>
+</p:sld>
+</file>
+
+<file path=ppt/slides/slide36.xml><?xml version="1.0" encoding="utf-8"?>
+<p:sld xmlns:a="http://schemas.openxmlformats.org/drawingml/2006/main" xmlns:p="http://schemas.openxmlformats.org/presentationml/2006/main" xmlns:r="http://schemas.openxmlformats.org/officeDocument/2006/relationships">
+  <p:cSld>
+    <p:spTree>
+      <p:nvGrpSpPr>
+        <p:cNvPr id="1" name=""/>
+        <p:cNvGrpSpPr/>
+        <p:nvPr/>
+      </p:nvGrpSpPr>
+      <p:grpSpPr/>
+      <p:sp>
+        <p:nvSpPr>
+          <p:cNvPr id="71" name="PlaceHolder 1"/>
+          <p:cNvSpPr>
+            <a:spLocks noGrp="1"/>
+          </p:cNvSpPr>
+          <p:nvPr>
+            <p:ph/>
+          </p:nvPr>
+        </p:nvSpPr>
+        <p:spPr>
+          <a:xfrm>
+            <a:off x="411120" y="1321560"/>
+            <a:ext cx="8228160" cy="4637520"/>
+          </a:xfrm>
+          <a:prstGeom prst="rect">
+            <a:avLst/>
+          </a:prstGeom>
+          <a:noFill/>
+          <a:ln w="0">
+            <a:noFill/>
+          </a:ln>
+        </p:spPr>
+        <p:txBody>
+          <a:bodyPr lIns="91440" tIns="45720" rIns="91440" bIns="45720" anchor="t">
+            <a:noAutofit/>
+          </a:bodyPr>
+          <a:lstStyle/>
+          <a:p>
+            <a:pPr indent="0" algn="l" defTabSz="457200">
+              <a:lnSpc>
+                <a:spcPct val="100000"/>
+              </a:lnSpc>
+              <a:spcBef>
+                <a:spcPts val="641"/>
+              </a:spcBef>
+              <a:buNone/>
+              <a:tabLst>
+                <a:tab pos="0" algn="l"/>
+              </a:tabLst>
+            </a:pPr>
+            <a:endParaRPr lang="en-US" sz="3200" b="0" u="none" strike="noStrike" dirty="0">
+              <a:solidFill>
+                <a:schemeClr val="dk1"/>
+              </a:solidFill>
+              <a:effectLst/>
+              <a:uFillTx/>
+              <a:latin typeface="Calibri"/>
+            </a:endParaRPr>
+          </a:p>
+          <a:p>
+            <a:pPr marL="343080" indent="0" algn="l" defTabSz="457200">
+              <a:lnSpc>
+                <a:spcPct val="100000"/>
+              </a:lnSpc>
+              <a:spcBef>
+                <a:spcPts val="641"/>
+              </a:spcBef>
+              <a:buNone/>
+              <a:tabLst>
+                <a:tab pos="0" algn="l"/>
+              </a:tabLst>
+            </a:pPr>
+            <a:r>
+              <a:rPr lang="en-US" sz="3200" b="0" u="none" strike="noStrike" dirty="0">
+                <a:solidFill>
+                  <a:schemeClr val="dk1"/>
+                </a:solidFill>
+                <a:effectLst/>
+                <a:uFillTx/>
+                <a:latin typeface="Calibri"/>
+              </a:rPr>
+              <a:t/>
+            </a:r>
+            <a:r>
+              <a:rPr lang="en-US" sz="3200" b="0" u="none" strike="noStrike" dirty="0" err="1">
+                <a:solidFill>
+                  <a:schemeClr val="dk1"/>
+                </a:solidFill>
+                <a:effectLst/>
+                <a:uFillTx/>
+                <a:latin typeface="Calibri"/>
+              </a:rPr>
+              <a:t/>
+            </a:r>
+            <a:r>
+              <a:rPr lang="en-US" sz="3200" b="0" u="none" strike="noStrike" dirty="0">
+                <a:solidFill>
+                  <a:schemeClr val="dk1"/>
+                </a:solidFill>
+                <a:effectLst/>
+                <a:uFillTx/>
+                <a:latin typeface="Calibri"/>
+              </a:rPr>
+              <a:t/>
+            </a:r>
+          </a:p>
+          <a:p>
+            <a:pPr marL="343080" indent="-343080" algn="l" defTabSz="457200">
+              <a:lnSpc>
+                <a:spcPct val="100000"/>
+              </a:lnSpc>
+              <a:spcBef>
+                <a:spcPts val="641"/>
+              </a:spcBef>
+              <a:buClr>
+                <a:srgbClr val="000000"/>
+              </a:buClr>
+              <a:buSzPct val="45000"/>
+              <a:buFont typeface="Wingdings" charset="2"/>
+              <a:buChar char=""/>
+              <a:tabLst>
+                <a:tab pos="0" algn="l"/>
+              </a:tabLst>
+            </a:pPr>
+            <a:r>
+              <a:rPr lang="en-US" sz="2600" b="1" u="none" strike="noStrike" dirty="0">
+                <a:solidFill>
+                  <a:schemeClr val="tx2"/>
+                </a:solidFill>
+                <a:effectLst/>
+                <a:uFillTx/>
+                <a:latin typeface="Calibri"/>
+              </a:rPr>
+              <a:t>REQ-002 — Classificador com nível de confiança qualitativo e calibração v1.21</a:t>
+            </a:r>
+            <a:r>
+              <a:rPr lang="en-US" sz="2600" b="1" u="none" strike="noStrike" dirty="0" err="1">
+                <a:solidFill>
+                  <a:schemeClr val="tx2"/>
+                </a:solidFill>
+                <a:effectLst/>
+                <a:uFillTx/>
+                <a:latin typeface="Calibri"/>
+              </a:rPr>
+              <a:t/>
+            </a:r>
+            <a:r>
+              <a:rPr lang="en-US" sz="2600" b="1" u="none" strike="noStrike" dirty="0">
+                <a:solidFill>
+                  <a:schemeClr val="tx2"/>
+                </a:solidFill>
+                <a:effectLst/>
+                <a:uFillTx/>
+                <a:latin typeface="Calibri"/>
+              </a:rPr>
+              <a:t/>
+            </a:r>
+          </a:p>
+          <a:p>
+            <a:pPr marL="540000" lvl="1" algn="l" defTabSz="457200">
+              <a:lnSpc>
+                <a:spcPct val="100000"/>
+              </a:lnSpc>
+              <a:spcBef>
+                <a:spcPts val="561"/>
+              </a:spcBef>
+              <a:buClr>
+                <a:srgbClr val="000000"/>
+              </a:buClr>
+              <a:buSzPct val="45000"/>
+              <a:tabLst>
+                <a:tab pos="0" algn="l"/>
+              </a:tabLst>
+            </a:pPr>
+            <a:r>
+              <a:rPr lang="en-US" sz="2600" b="1" u="none" strike="noStrike" dirty="0" err="1">
+                <a:solidFill>
+                  <a:schemeClr val="dk1"/>
+                </a:solidFill>
+                <a:effectLst/>
+                <a:uFillTx/>
+                <a:latin typeface="Calibri"/>
+                <a:ea typeface="Microsoft YaHei"/>
+              </a:rPr>
+              <a:t>Requisitos</a:t>
+            </a:r>
+            <a:r>
+              <a:rPr lang="en-US" sz="2600" b="1" u="none" strike="noStrike" dirty="0">
+                <a:solidFill>
+                  <a:schemeClr val="dk1"/>
+                </a:solidFill>
+                <a:effectLst/>
+                <a:uFillTx/>
+                <a:latin typeface="Calibri"/>
+                <a:ea typeface="Microsoft YaHei"/>
+              </a:rPr>
+              <a:t> </a:t>
+            </a:r>
+            <a:r>
+              <a:rPr lang="en-US" sz="2600" b="1" u="none" strike="noStrike" dirty="0" err="1">
+                <a:solidFill>
+                  <a:schemeClr val="dk1"/>
+                </a:solidFill>
+                <a:effectLst/>
+                <a:uFillTx/>
+                <a:latin typeface="Calibri"/>
+                <a:ea typeface="Microsoft YaHei"/>
+              </a:rPr>
+              <a:t>envolvidos</a:t>
+            </a:r>
+            <a:r>
+              <a:rPr lang="en-US" sz="2600" b="0" u="none" strike="noStrike" dirty="0">
+                <a:solidFill>
+                  <a:schemeClr val="dk1"/>
+                </a:solidFill>
+                <a:effectLst/>
+                <a:uFillTx/>
+                <a:latin typeface="Calibri"/>
+                <a:ea typeface="Microsoft YaHei"/>
+              </a:rPr>
+              <a:t>: REQ-002, REQ-014</a:t>
+            </a:r>
+            <a:r>
+              <a:rPr lang="en-US" sz="2600" b="0" u="none" strike="noStrike" dirty="0" err="1">
+                <a:solidFill>
+                  <a:schemeClr val="dk1"/>
+                </a:solidFill>
+                <a:effectLst/>
+                <a:uFillTx/>
+                <a:latin typeface="Calibri"/>
+                <a:ea typeface="Microsoft YaHei"/>
+              </a:rPr>
+              <a:t/>
+            </a:r>
+            <a:r>
+              <a:rPr lang="en-US" sz="2600" dirty="0" err="1">
+                <a:solidFill>
+                  <a:schemeClr val="dk1"/>
+                </a:solidFill>
+                <a:latin typeface="Calibri"/>
+                <a:ea typeface="Microsoft YaHei"/>
+              </a:rPr>
+              <a:t/>
+            </a:r>
+            <a:r>
+              <a:rPr lang="en-US" sz="2600" b="0" u="none" strike="noStrike" dirty="0">
+                <a:solidFill>
+                  <a:schemeClr val="dk1"/>
+                </a:solidFill>
+                <a:effectLst/>
+                <a:uFillTx/>
+                <a:latin typeface="Calibri"/>
+                <a:ea typeface="Microsoft YaHei"/>
+              </a:rPr>
+              <a:t/>
+            </a:r>
+          </a:p>
+          <a:p>
+            <a:pPr marL="540000" lvl="1" algn="l" defTabSz="457200">
+              <a:lnSpc>
+                <a:spcPct val="100000"/>
+              </a:lnSpc>
+              <a:spcBef>
+                <a:spcPts val="561"/>
+              </a:spcBef>
+              <a:buClr>
+                <a:srgbClr val="000000"/>
+              </a:buClr>
+              <a:buSzPct val="45000"/>
+              <a:tabLst>
+                <a:tab pos="0" algn="l"/>
+              </a:tabLst>
+            </a:pPr>
+            <a:endParaRPr lang="en-US" sz="1100" dirty="0">
+              <a:solidFill>
+                <a:schemeClr val="dk1"/>
+              </a:solidFill>
+              <a:latin typeface="Calibri"/>
+              <a:ea typeface="Microsoft YaHei"/>
+            </a:endParaRPr>
+          </a:p>
+          <a:p>
+            <a:pPr marL="540000" lvl="1" algn="l" defTabSz="457200">
+              <a:lnSpc>
+                <a:spcPct val="100000"/>
+              </a:lnSpc>
+              <a:spcBef>
+                <a:spcPts val="561"/>
+              </a:spcBef>
+              <a:buClr>
+                <a:srgbClr val="000000"/>
+              </a:buClr>
+              <a:buSzPct val="45000"/>
+              <a:tabLst>
+                <a:tab pos="0" algn="l"/>
+              </a:tabLst>
+            </a:pPr>
+            <a:r>
+              <a:rPr lang="en-US" sz="2600" b="1" dirty="0" err="1">
+                <a:solidFill>
+                  <a:schemeClr val="dk1"/>
+                </a:solidFill>
+                <a:latin typeface="Calibri"/>
+                <a:ea typeface="Microsoft YaHei"/>
+              </a:rPr>
+              <a:t>Porcentagem</a:t>
+            </a:r>
+            <a:r>
+              <a:rPr lang="en-US" sz="2600" b="1" dirty="0">
+                <a:solidFill>
+                  <a:schemeClr val="dk1"/>
+                </a:solidFill>
+                <a:latin typeface="Calibri"/>
+                <a:ea typeface="Microsoft YaHei"/>
+              </a:rPr>
+              <a:t> de </a:t>
+            </a:r>
+            <a:r>
+              <a:rPr lang="en-US" sz="2600" b="1" dirty="0" err="1">
+                <a:solidFill>
+                  <a:schemeClr val="dk1"/>
+                </a:solidFill>
+                <a:latin typeface="Calibri"/>
+                <a:ea typeface="Microsoft YaHei"/>
+              </a:rPr>
+              <a:t>cobertura</a:t>
+            </a:r>
+            <a:r>
+              <a:rPr lang="en-US" sz="2600" b="1" dirty="0">
+                <a:solidFill>
+                  <a:schemeClr val="dk1"/>
+                </a:solidFill>
+                <a:latin typeface="Calibri"/>
+                <a:ea typeface="Microsoft YaHei"/>
+              </a:rPr>
+              <a:t> </a:t>
+            </a:r>
+            <a:r>
+              <a:rPr lang="en-US" sz="2600" b="1" dirty="0" err="1">
+                <a:solidFill>
+                  <a:schemeClr val="dk1"/>
+                </a:solidFill>
+                <a:latin typeface="Calibri"/>
+                <a:ea typeface="Microsoft YaHei"/>
+              </a:rPr>
+              <a:t>por</a:t>
+            </a:r>
+            <a:r>
+              <a:rPr lang="en-US" sz="2600" b="1" dirty="0">
+                <a:solidFill>
+                  <a:schemeClr val="dk1"/>
+                </a:solidFill>
+                <a:latin typeface="Calibri"/>
+                <a:ea typeface="Microsoft YaHei"/>
+              </a:rPr>
+              <a:t> </a:t>
+            </a:r>
+            <a:r>
+              <a:rPr lang="en-US" sz="2600" b="1" dirty="0" err="1">
+                <a:solidFill>
+                  <a:schemeClr val="dk1"/>
+                </a:solidFill>
+                <a:latin typeface="Calibri"/>
+                <a:ea typeface="Microsoft YaHei"/>
+              </a:rPr>
+              <a:t>requisito</a:t>
+            </a:r>
+            <a:r>
+              <a:rPr lang="en-US" sz="2600" dirty="0">
+                <a:solidFill>
+                  <a:schemeClr val="dk1"/>
+                </a:solidFill>
+                <a:latin typeface="Calibri"/>
+                <a:ea typeface="Microsoft YaHei"/>
+              </a:rPr>
+              <a:t>:</a:t>
+            </a:r>
+            <a:endParaRPr lang="en-US" sz="2600" b="0" u="none" strike="noStrike" dirty="0">
+              <a:solidFill>
+                <a:schemeClr val="dk1"/>
+              </a:solidFill>
+              <a:effectLst/>
+              <a:uFillTx/>
+              <a:latin typeface="Calibri"/>
+            </a:endParaRPr>
+          </a:p>
+          <a:p>
+            <a:pPr marL="864000" lvl="1" indent="-324000" algn="l" defTabSz="457200">
+              <a:lnSpc>
+                <a:spcPct val="100000"/>
+              </a:lnSpc>
+              <a:spcBef>
+                <a:spcPts val="561"/>
+              </a:spcBef>
+              <a:buClr>
+                <a:srgbClr val="000000"/>
+              </a:buClr>
+              <a:buSzPct val="45000"/>
+              <a:buFont typeface="Wingdings" charset="2"/>
+              <a:buChar char=""/>
+              <a:tabLst>
+                <a:tab pos="0" algn="l"/>
+              </a:tabLst>
+            </a:pPr>
+            <a:r>
+              <a:rPr lang="en-US" sz="2600" b="0" u="none" strike="noStrike" dirty="0">
+                <a:solidFill>
+                  <a:schemeClr val="dk1"/>
+                </a:solidFill>
+                <a:effectLst/>
+                <a:uFillTx/>
+                <a:latin typeface="Calibri"/>
+                <a:ea typeface="Microsoft YaHei"/>
+              </a:rPr>
+              <a:t>REQ-002: antes ~30%, depois ~40%, delta +10</a:t>
+            </a:r>
+            <a:r>
+              <a:rPr lang="en-US" sz="2600" b="0" u="none" strike="noStrike" dirty="0" err="1">
+                <a:solidFill>
+                  <a:schemeClr val="dk1"/>
+                </a:solidFill>
+                <a:effectLst/>
+                <a:uFillTx/>
+                <a:latin typeface="Calibri"/>
+                <a:ea typeface="Microsoft YaHei"/>
+              </a:rPr>
+              <a:t/>
+            </a:r>
+            <a:r>
+              <a:rPr lang="en-US" sz="2600" dirty="0" err="1">
+                <a:solidFill>
+                  <a:schemeClr val="dk1"/>
+                </a:solidFill>
+                <a:latin typeface="Calibri"/>
+                <a:ea typeface="Microsoft YaHei"/>
+              </a:rPr>
+              <a:t/>
+            </a:r>
+            <a:r>
+              <a:rPr lang="en-US" sz="2600" b="0" u="none" strike="noStrike" dirty="0" err="1">
+                <a:solidFill>
+                  <a:schemeClr val="dk1"/>
+                </a:solidFill>
+                <a:effectLst/>
+                <a:uFillTx/>
+                <a:latin typeface="Calibri"/>
+                <a:ea typeface="Microsoft YaHei"/>
+              </a:rPr>
+              <a:t/>
+            </a:r>
+            <a:r>
+              <a:rPr lang="en-US" sz="2600" b="0" u="none" strike="noStrike" dirty="0">
+                <a:solidFill>
+                  <a:schemeClr val="dk1"/>
+                </a:solidFill>
+                <a:effectLst/>
+                <a:uFillTx/>
+                <a:latin typeface="Calibri"/>
+                <a:ea typeface="Microsoft YaHei"/>
+              </a:rPr>
+              <a:t/>
+            </a:r>
+            <a:endParaRPr lang="en-US" sz="2600" b="0" u="none" strike="noStrike" dirty="0">
+              <a:solidFill>
+                <a:schemeClr val="dk1"/>
+              </a:solidFill>
+              <a:effectLst/>
+              <a:uFillTx/>
+              <a:latin typeface="Calibri"/>
+            </a:endParaRPr>
+          </a:p>
+          <a:p>
+            <a:pPr marL="864000" lvl="1" indent="-324000" algn="l" defTabSz="457200">
+              <a:lnSpc>
+                <a:spcPct val="100000"/>
+              </a:lnSpc>
+              <a:spcBef>
+                <a:spcPts val="561"/>
+              </a:spcBef>
+              <a:buClr>
+                <a:srgbClr val="000000"/>
+              </a:buClr>
+              <a:buSzPct val="45000"/>
+              <a:buFont typeface="Wingdings" charset="2"/>
+              <a:buChar char=""/>
+              <a:tabLst>
+                <a:tab pos="0" algn="l"/>
+              </a:tabLst>
+            </a:pPr>
+            <a:r>
+              <a:rPr lang="en-US" sz="2600" b="0" u="none" strike="noStrike" dirty="0">
+                <a:solidFill>
+                  <a:schemeClr val="dk1"/>
+                </a:solidFill>
+                <a:effectLst/>
+                <a:uFillTx/>
+                <a:latin typeface="Calibri"/>
+                <a:ea typeface="Microsoft YaHei"/>
+              </a:rPr>
+              <a:t>REQ-014: antes ~25%, depois ~35%, delta +10</a:t>
+            </a:r>
+            <a:r>
+              <a:rPr lang="en-US" sz="2600" b="0" u="none" strike="noStrike" dirty="0" err="1">
+                <a:solidFill>
+                  <a:schemeClr val="dk1"/>
+                </a:solidFill>
+                <a:effectLst/>
+                <a:uFillTx/>
+                <a:latin typeface="Calibri"/>
+                <a:ea typeface="Microsoft YaHei"/>
+              </a:rPr>
+              <a:t/>
+            </a:r>
+            <a:r>
+              <a:rPr lang="en-US" sz="2600" dirty="0" err="1">
+                <a:solidFill>
+                  <a:schemeClr val="dk1"/>
+                </a:solidFill>
+                <a:latin typeface="Calibri"/>
+                <a:ea typeface="Microsoft YaHei"/>
+              </a:rPr>
+              <a:t/>
+            </a:r>
+            <a:r>
+              <a:rPr lang="en-US" sz="2600" b="0" u="none" strike="noStrike" dirty="0" err="1">
+                <a:solidFill>
+                  <a:schemeClr val="dk1"/>
+                </a:solidFill>
+                <a:effectLst/>
+                <a:uFillTx/>
+                <a:latin typeface="Calibri"/>
+                <a:ea typeface="Microsoft YaHei"/>
+              </a:rPr>
+              <a:t/>
+            </a:r>
+            <a:r>
+              <a:rPr lang="en-US" sz="2600" b="0" u="none" strike="noStrike" dirty="0">
+                <a:solidFill>
+                  <a:schemeClr val="dk1"/>
+                </a:solidFill>
+                <a:effectLst/>
+                <a:uFillTx/>
+                <a:latin typeface="Calibri"/>
+                <a:ea typeface="Microsoft YaHei"/>
+              </a:rPr>
+              <a:t/>
+            </a:r>
+            <a:endParaRPr lang="en-US" sz="2600" b="0" u="none" strike="noStrike" dirty="0">
+              <a:solidFill>
+                <a:schemeClr val="dk1"/>
+              </a:solidFill>
+              <a:effectLst/>
+              <a:uFillTx/>
+              <a:latin typeface="Calibri"/>
+            </a:endParaRPr>
+          </a:p>
+        </p:txBody>
+      </p:sp>
+      <p:pic>
+        <p:nvPicPr>
+          <p:cNvPr id="72" name="Imagem 71"/>
+          <p:cNvPicPr/>
+          <p:nvPr/>
+        </p:nvPicPr>
+        <p:blipFill>
+          <a:blip r:embed="rId2"/>
+          <a:stretch/>
+        </p:blipFill>
+        <p:spPr>
+          <a:xfrm>
+            <a:off x="720" y="-28800"/>
+            <a:ext cx="9142560" cy="1647720"/>
+          </a:xfrm>
+          <a:prstGeom prst="rect">
+            <a:avLst/>
+          </a:prstGeom>
+          <a:noFill/>
+          <a:ln w="0">
+            <a:noFill/>
+          </a:ln>
+        </p:spPr>
+      </p:pic>
+      <p:sp>
+        <p:nvSpPr>
+          <p:cNvPr id="73" name="Title 3"/>
+          <p:cNvSpPr/>
+          <p:nvPr/>
+        </p:nvSpPr>
+        <p:spPr>
+          <a:xfrm>
+            <a:off x="915480" y="180000"/>
+            <a:ext cx="8228160" cy="1141560"/>
+          </a:xfrm>
+          <a:prstGeom prst="rect">
+            <a:avLst/>
+          </a:prstGeom>
+          <a:noFill/>
+          <a:ln w="0">
+            <a:noFill/>
+          </a:ln>
+        </p:spPr>
+        <p:style>
+          <a:lnRef idx="0">
+            <a:scrgbClr r="0" g="0" b="0"/>
+          </a:lnRef>
+          <a:fillRef idx="0">
+            <a:scrgbClr r="0" g="0" b="0"/>
+          </a:fillRef>
+          <a:effectRef idx="0">
+            <a:scrgbClr r="0" g="0" b="0"/>
+          </a:effectRef>
+          <a:fontRef idx="minor"/>
+        </p:style>
+        <p:txBody>
+          <a:bodyPr lIns="90000" tIns="45000" rIns="90000" bIns="45000" anchor="ctr">
+            <a:noAutofit/>
+          </a:bodyPr>
+          <a:lstStyle/>
+          <a:p>
+            <a:pPr algn="ctr" defTabSz="457200">
+              <a:lnSpc>
+                <a:spcPct val="100000"/>
+              </a:lnSpc>
+            </a:pPr>
+            <a:r>
+              <a:rPr lang="en-US" sz="4400" b="0" u="none" strike="noStrike">
+                <a:solidFill>
+                  <a:srgbClr val="EA7500"/>
+                </a:solidFill>
+                <a:effectLst/>
+                <a:uFillTx/>
+                <a:latin typeface="Calibri"/>
+              </a:rPr>
+              <a:t>Realizações da Sprint</a:t>
+            </a:r>
+            <a:endParaRPr lang="pt-BR" sz="4400" b="0" u="none" strike="noStrike">
+              <a:solidFill>
+                <a:srgbClr val="000000"/>
+              </a:solidFill>
+              <a:effectLst/>
+              <a:uFillTx/>
+              <a:latin typeface="Arial"/>
+            </a:endParaRPr>
+          </a:p>
+        </p:txBody>
+      </p:sp>
+    </p:spTree>
+  </p:cSld>
+  <p:clrMapOvr>
+    <a:masterClrMapping/>
+  </p:clrMapOvr>
+</p:sld>
+</file>
+
+<file path=ppt/slides/slide37.xml><?xml version="1.0" encoding="utf-8"?>
+<p:sld xmlns:a="http://schemas.openxmlformats.org/drawingml/2006/main" xmlns:p="http://schemas.openxmlformats.org/presentationml/2006/main" xmlns:r="http://schemas.openxmlformats.org/officeDocument/2006/relationships">
+  <p:cSld>
+    <p:spTree>
+      <p:nvGrpSpPr>
+        <p:cNvPr id="1" name=""/>
+        <p:cNvGrpSpPr/>
+        <p:nvPr/>
+      </p:nvGrpSpPr>
+      <p:grpSpPr/>
+      <p:sp>
+        <p:nvSpPr>
+          <p:cNvPr id="71" name="PlaceHolder 1"/>
+          <p:cNvSpPr>
+            <a:spLocks noGrp="1"/>
+          </p:cNvSpPr>
+          <p:nvPr>
+            <p:ph/>
+          </p:nvPr>
+        </p:nvSpPr>
+        <p:spPr>
+          <a:xfrm>
+            <a:off x="411120" y="1321560"/>
+            <a:ext cx="8228160" cy="4637520"/>
+          </a:xfrm>
+          <a:prstGeom prst="rect">
+            <a:avLst/>
+          </a:prstGeom>
+          <a:noFill/>
+          <a:ln w="0">
+            <a:noFill/>
+          </a:ln>
+        </p:spPr>
+        <p:txBody>
+          <a:bodyPr lIns="91440" tIns="45720" rIns="91440" bIns="45720" anchor="t">
+            <a:noAutofit/>
+          </a:bodyPr>
+          <a:lstStyle/>
+          <a:p>
+            <a:pPr indent="0" algn="l" defTabSz="457200">
+              <a:lnSpc>
+                <a:spcPct val="100000"/>
+              </a:lnSpc>
+              <a:spcBef>
+                <a:spcPts val="641"/>
+              </a:spcBef>
+              <a:buNone/>
+              <a:tabLst>
+                <a:tab pos="0" algn="l"/>
+              </a:tabLst>
+            </a:pPr>
+            <a:endParaRPr lang="en-US" sz="3200" b="0" u="none" strike="noStrike" dirty="0">
+              <a:solidFill>
+                <a:schemeClr val="dk1"/>
+              </a:solidFill>
+              <a:effectLst/>
+              <a:uFillTx/>
+              <a:latin typeface="Calibri"/>
+            </a:endParaRPr>
+          </a:p>
+          <a:p>
+            <a:pPr marL="343080" indent="0" algn="l" defTabSz="457200">
+              <a:lnSpc>
+                <a:spcPct val="100000"/>
+              </a:lnSpc>
+              <a:spcBef>
+                <a:spcPts val="641"/>
+              </a:spcBef>
+              <a:buNone/>
+              <a:tabLst>
+                <a:tab pos="0" algn="l"/>
+              </a:tabLst>
+            </a:pPr>
+            <a:r>
+              <a:rPr lang="en-US" sz="3200" b="0" u="none" strike="noStrike" dirty="0">
+                <a:solidFill>
+                  <a:schemeClr val="dk1"/>
+                </a:solidFill>
+                <a:effectLst/>
+                <a:uFillTx/>
+                <a:latin typeface="Calibri"/>
+              </a:rPr>
+              <a:t/>
+            </a:r>
+            <a:r>
+              <a:rPr lang="en-US" sz="3200" b="0" u="none" strike="noStrike" dirty="0" err="1">
+                <a:solidFill>
+                  <a:schemeClr val="dk1"/>
+                </a:solidFill>
+                <a:effectLst/>
+                <a:uFillTx/>
+                <a:latin typeface="Calibri"/>
+              </a:rPr>
+              <a:t/>
+            </a:r>
+            <a:r>
+              <a:rPr lang="en-US" sz="3200" b="0" u="none" strike="noStrike" dirty="0">
+                <a:solidFill>
+                  <a:schemeClr val="dk1"/>
+                </a:solidFill>
+                <a:effectLst/>
+                <a:uFillTx/>
+                <a:latin typeface="Calibri"/>
+              </a:rPr>
+              <a:t/>
+            </a:r>
+          </a:p>
+          <a:p>
+            <a:pPr marL="343080" indent="-343080" algn="l" defTabSz="457200">
+              <a:lnSpc>
+                <a:spcPct val="100000"/>
+              </a:lnSpc>
+              <a:spcBef>
+                <a:spcPts val="641"/>
+              </a:spcBef>
+              <a:buClr>
+                <a:srgbClr val="000000"/>
+              </a:buClr>
+              <a:buSzPct val="45000"/>
+              <a:buFont typeface="Wingdings" charset="2"/>
+              <a:buChar char=""/>
+              <a:tabLst>
+                <a:tab pos="0" algn="l"/>
+              </a:tabLst>
+            </a:pPr>
+            <a:r>
+              <a:rPr lang="en-US" sz="2600" b="1" u="none" strike="noStrike" dirty="0">
+                <a:solidFill>
+                  <a:schemeClr val="tx2"/>
+                </a:solidFill>
+                <a:effectLst/>
+                <a:uFillTx/>
+                <a:latin typeface="Calibri"/>
+              </a:rPr>
+              <a:t>REQ-013 — Index tsvector em pares_qa para busca full-text</a:t>
+            </a:r>
+            <a:r>
+              <a:rPr lang="en-US" sz="2600" b="1" u="none" strike="noStrike" dirty="0" err="1">
+                <a:solidFill>
+                  <a:schemeClr val="tx2"/>
+                </a:solidFill>
+                <a:effectLst/>
+                <a:uFillTx/>
+                <a:latin typeface="Calibri"/>
+              </a:rPr>
+              <a:t/>
+            </a:r>
+            <a:r>
+              <a:rPr lang="en-US" sz="2600" b="1" u="none" strike="noStrike" dirty="0">
+                <a:solidFill>
+                  <a:schemeClr val="tx2"/>
+                </a:solidFill>
+                <a:effectLst/>
+                <a:uFillTx/>
+                <a:latin typeface="Calibri"/>
+              </a:rPr>
+              <a:t/>
+            </a:r>
+          </a:p>
+          <a:p>
+            <a:pPr marL="540000" lvl="1" algn="l" defTabSz="457200">
+              <a:lnSpc>
+                <a:spcPct val="100000"/>
+              </a:lnSpc>
+              <a:spcBef>
+                <a:spcPts val="561"/>
+              </a:spcBef>
+              <a:buClr>
+                <a:srgbClr val="000000"/>
+              </a:buClr>
+              <a:buSzPct val="45000"/>
+              <a:tabLst>
+                <a:tab pos="0" algn="l"/>
+              </a:tabLst>
+            </a:pPr>
+            <a:r>
+              <a:rPr lang="en-US" sz="2600" b="1" u="none" strike="noStrike" dirty="0" err="1">
+                <a:solidFill>
+                  <a:schemeClr val="dk1"/>
+                </a:solidFill>
+                <a:effectLst/>
+                <a:uFillTx/>
+                <a:latin typeface="Calibri"/>
+                <a:ea typeface="Microsoft YaHei"/>
+              </a:rPr>
+              <a:t>Requisitos</a:t>
+            </a:r>
+            <a:r>
+              <a:rPr lang="en-US" sz="2600" b="1" u="none" strike="noStrike" dirty="0">
+                <a:solidFill>
+                  <a:schemeClr val="dk1"/>
+                </a:solidFill>
+                <a:effectLst/>
+                <a:uFillTx/>
+                <a:latin typeface="Calibri"/>
+                <a:ea typeface="Microsoft YaHei"/>
+              </a:rPr>
+              <a:t> </a:t>
+            </a:r>
+            <a:r>
+              <a:rPr lang="en-US" sz="2600" b="1" u="none" strike="noStrike" dirty="0" err="1">
+                <a:solidFill>
+                  <a:schemeClr val="dk1"/>
+                </a:solidFill>
+                <a:effectLst/>
+                <a:uFillTx/>
+                <a:latin typeface="Calibri"/>
+                <a:ea typeface="Microsoft YaHei"/>
+              </a:rPr>
+              <a:t>envolvidos</a:t>
+            </a:r>
+            <a:r>
+              <a:rPr lang="en-US" sz="2600" b="0" u="none" strike="noStrike" dirty="0">
+                <a:solidFill>
+                  <a:schemeClr val="dk1"/>
+                </a:solidFill>
+                <a:effectLst/>
+                <a:uFillTx/>
+                <a:latin typeface="Calibri"/>
+                <a:ea typeface="Microsoft YaHei"/>
+              </a:rPr>
+              <a:t>: REQ-013</a:t>
+            </a:r>
+            <a:r>
+              <a:rPr lang="en-US" sz="2600" b="0" u="none" strike="noStrike" dirty="0" err="1">
+                <a:solidFill>
+                  <a:schemeClr val="dk1"/>
+                </a:solidFill>
+                <a:effectLst/>
+                <a:uFillTx/>
+                <a:latin typeface="Calibri"/>
+                <a:ea typeface="Microsoft YaHei"/>
+              </a:rPr>
+              <a:t/>
+            </a:r>
+            <a:r>
+              <a:rPr lang="en-US" sz="2600" dirty="0" err="1">
+                <a:solidFill>
+                  <a:schemeClr val="dk1"/>
+                </a:solidFill>
+                <a:latin typeface="Calibri"/>
+                <a:ea typeface="Microsoft YaHei"/>
+              </a:rPr>
+              <a:t/>
+            </a:r>
+            <a:r>
+              <a:rPr lang="en-US" sz="2600" b="0" u="none" strike="noStrike" dirty="0">
+                <a:solidFill>
+                  <a:schemeClr val="dk1"/>
+                </a:solidFill>
+                <a:effectLst/>
+                <a:uFillTx/>
+                <a:latin typeface="Calibri"/>
+                <a:ea typeface="Microsoft YaHei"/>
+              </a:rPr>
+              <a:t/>
+            </a:r>
+          </a:p>
+          <a:p>
+            <a:pPr marL="540000" lvl="1" algn="l" defTabSz="457200">
+              <a:lnSpc>
+                <a:spcPct val="100000"/>
+              </a:lnSpc>
+              <a:spcBef>
+                <a:spcPts val="561"/>
+              </a:spcBef>
+              <a:buClr>
+                <a:srgbClr val="000000"/>
+              </a:buClr>
+              <a:buSzPct val="45000"/>
+              <a:tabLst>
+                <a:tab pos="0" algn="l"/>
+              </a:tabLst>
+            </a:pPr>
+            <a:endParaRPr lang="en-US" sz="1100" dirty="0">
+              <a:solidFill>
+                <a:schemeClr val="dk1"/>
+              </a:solidFill>
+              <a:latin typeface="Calibri"/>
+              <a:ea typeface="Microsoft YaHei"/>
+            </a:endParaRPr>
+          </a:p>
+          <a:p>
+            <a:pPr marL="540000" lvl="1" algn="l" defTabSz="457200">
+              <a:lnSpc>
+                <a:spcPct val="100000"/>
+              </a:lnSpc>
+              <a:spcBef>
+                <a:spcPts val="561"/>
+              </a:spcBef>
+              <a:buClr>
+                <a:srgbClr val="000000"/>
+              </a:buClr>
+              <a:buSzPct val="45000"/>
+              <a:tabLst>
+                <a:tab pos="0" algn="l"/>
+              </a:tabLst>
+            </a:pPr>
+            <a:r>
+              <a:rPr lang="en-US" sz="2600" b="1" dirty="0" err="1">
+                <a:solidFill>
+                  <a:schemeClr val="dk1"/>
+                </a:solidFill>
+                <a:latin typeface="Calibri"/>
+                <a:ea typeface="Microsoft YaHei"/>
+              </a:rPr>
+              <a:t>Porcentagem</a:t>
+            </a:r>
+            <a:r>
+              <a:rPr lang="en-US" sz="2600" b="1" dirty="0">
+                <a:solidFill>
+                  <a:schemeClr val="dk1"/>
+                </a:solidFill>
+                <a:latin typeface="Calibri"/>
+                <a:ea typeface="Microsoft YaHei"/>
+              </a:rPr>
+              <a:t> de </a:t>
+            </a:r>
+            <a:r>
+              <a:rPr lang="en-US" sz="2600" b="1" dirty="0" err="1">
+                <a:solidFill>
+                  <a:schemeClr val="dk1"/>
+                </a:solidFill>
+                <a:latin typeface="Calibri"/>
+                <a:ea typeface="Microsoft YaHei"/>
+              </a:rPr>
+              <a:t>cobertura</a:t>
+            </a:r>
+            <a:r>
+              <a:rPr lang="en-US" sz="2600" b="1" dirty="0">
+                <a:solidFill>
+                  <a:schemeClr val="dk1"/>
+                </a:solidFill>
+                <a:latin typeface="Calibri"/>
+                <a:ea typeface="Microsoft YaHei"/>
+              </a:rPr>
+              <a:t> </a:t>
+            </a:r>
+            <a:r>
+              <a:rPr lang="en-US" sz="2600" b="1" dirty="0" err="1">
+                <a:solidFill>
+                  <a:schemeClr val="dk1"/>
+                </a:solidFill>
+                <a:latin typeface="Calibri"/>
+                <a:ea typeface="Microsoft YaHei"/>
+              </a:rPr>
+              <a:t>por</a:t>
+            </a:r>
+            <a:r>
+              <a:rPr lang="en-US" sz="2600" b="1" dirty="0">
+                <a:solidFill>
+                  <a:schemeClr val="dk1"/>
+                </a:solidFill>
+                <a:latin typeface="Calibri"/>
+                <a:ea typeface="Microsoft YaHei"/>
+              </a:rPr>
+              <a:t> </a:t>
+            </a:r>
+            <a:r>
+              <a:rPr lang="en-US" sz="2600" b="1" dirty="0" err="1">
+                <a:solidFill>
+                  <a:schemeClr val="dk1"/>
+                </a:solidFill>
+                <a:latin typeface="Calibri"/>
+                <a:ea typeface="Microsoft YaHei"/>
+              </a:rPr>
+              <a:t>requisito</a:t>
+            </a:r>
+            <a:r>
+              <a:rPr lang="en-US" sz="2600" dirty="0">
+                <a:solidFill>
+                  <a:schemeClr val="dk1"/>
+                </a:solidFill>
+                <a:latin typeface="Calibri"/>
+                <a:ea typeface="Microsoft YaHei"/>
+              </a:rPr>
+              <a:t>:</a:t>
+            </a:r>
+            <a:endParaRPr lang="en-US" sz="2600" b="0" u="none" strike="noStrike" dirty="0">
+              <a:solidFill>
+                <a:schemeClr val="dk1"/>
+              </a:solidFill>
+              <a:effectLst/>
+              <a:uFillTx/>
+              <a:latin typeface="Calibri"/>
+            </a:endParaRPr>
+          </a:p>
+          <a:p>
+            <a:pPr marL="864000" lvl="1" indent="-324000" algn="l" defTabSz="457200">
+              <a:lnSpc>
+                <a:spcPct val="100000"/>
+              </a:lnSpc>
+              <a:spcBef>
+                <a:spcPts val="561"/>
+              </a:spcBef>
+              <a:buClr>
+                <a:srgbClr val="000000"/>
+              </a:buClr>
+              <a:buSzPct val="45000"/>
+              <a:buFont typeface="Wingdings" charset="2"/>
+              <a:buChar char=""/>
+              <a:tabLst>
+                <a:tab pos="0" algn="l"/>
+              </a:tabLst>
+            </a:pPr>
+            <a:r>
+              <a:rPr lang="en-US" sz="2600" b="0" u="none" strike="noStrike" dirty="0">
+                <a:solidFill>
+                  <a:schemeClr val="dk1"/>
+                </a:solidFill>
+                <a:effectLst/>
+                <a:uFillTx/>
+                <a:latin typeface="Calibri"/>
+                <a:ea typeface="Microsoft YaHei"/>
+              </a:rPr>
+              <a:t>REQ-013: antes ~70%, depois ~75%, delta +5</a:t>
+            </a:r>
+            <a:r>
+              <a:rPr lang="en-US" sz="2600" b="0" u="none" strike="noStrike" dirty="0" err="1">
+                <a:solidFill>
+                  <a:schemeClr val="dk1"/>
+                </a:solidFill>
+                <a:effectLst/>
+                <a:uFillTx/>
+                <a:latin typeface="Calibri"/>
+                <a:ea typeface="Microsoft YaHei"/>
+              </a:rPr>
+              <a:t/>
+            </a:r>
+            <a:r>
+              <a:rPr lang="en-US" sz="2600" dirty="0" err="1">
+                <a:solidFill>
+                  <a:schemeClr val="dk1"/>
+                </a:solidFill>
+                <a:latin typeface="Calibri"/>
+                <a:ea typeface="Microsoft YaHei"/>
+              </a:rPr>
+              <a:t/>
+            </a:r>
+            <a:r>
+              <a:rPr lang="en-US" sz="2600" b="0" u="none" strike="noStrike" dirty="0" err="1">
+                <a:solidFill>
+                  <a:schemeClr val="dk1"/>
+                </a:solidFill>
+                <a:effectLst/>
+                <a:uFillTx/>
+                <a:latin typeface="Calibri"/>
+                <a:ea typeface="Microsoft YaHei"/>
+              </a:rPr>
+              <a:t/>
+            </a:r>
+            <a:r>
+              <a:rPr lang="en-US" sz="2600" b="0" u="none" strike="noStrike" dirty="0">
+                <a:solidFill>
+                  <a:schemeClr val="dk1"/>
+                </a:solidFill>
+                <a:effectLst/>
+                <a:uFillTx/>
+                <a:latin typeface="Calibri"/>
+                <a:ea typeface="Microsoft YaHei"/>
+              </a:rPr>
+              <a:t/>
+            </a:r>
+            <a:endParaRPr lang="en-US" sz="2600" b="0" u="none" strike="noStrike" dirty="0">
+              <a:solidFill>
+                <a:schemeClr val="dk1"/>
+              </a:solidFill>
+              <a:effectLst/>
+              <a:uFillTx/>
+              <a:latin typeface="Calibri"/>
+            </a:endParaRPr>
+          </a:p>
+        </p:txBody>
+      </p:sp>
+      <p:pic>
+        <p:nvPicPr>
+          <p:cNvPr id="72" name="Imagem 71"/>
+          <p:cNvPicPr/>
+          <p:nvPr/>
+        </p:nvPicPr>
+        <p:blipFill>
+          <a:blip r:embed="rId2"/>
+          <a:stretch/>
+        </p:blipFill>
+        <p:spPr>
+          <a:xfrm>
+            <a:off x="720" y="-28800"/>
+            <a:ext cx="9142560" cy="1647720"/>
+          </a:xfrm>
+          <a:prstGeom prst="rect">
+            <a:avLst/>
+          </a:prstGeom>
+          <a:noFill/>
+          <a:ln w="0">
+            <a:noFill/>
+          </a:ln>
+        </p:spPr>
+      </p:pic>
+      <p:sp>
+        <p:nvSpPr>
+          <p:cNvPr id="73" name="Title 3"/>
+          <p:cNvSpPr/>
+          <p:nvPr/>
+        </p:nvSpPr>
+        <p:spPr>
+          <a:xfrm>
+            <a:off x="915480" y="180000"/>
+            <a:ext cx="8228160" cy="1141560"/>
+          </a:xfrm>
+          <a:prstGeom prst="rect">
+            <a:avLst/>
+          </a:prstGeom>
+          <a:noFill/>
+          <a:ln w="0">
+            <a:noFill/>
+          </a:ln>
+        </p:spPr>
+        <p:style>
+          <a:lnRef idx="0">
+            <a:scrgbClr r="0" g="0" b="0"/>
+          </a:lnRef>
+          <a:fillRef idx="0">
+            <a:scrgbClr r="0" g="0" b="0"/>
+          </a:fillRef>
+          <a:effectRef idx="0">
+            <a:scrgbClr r="0" g="0" b="0"/>
+          </a:effectRef>
+          <a:fontRef idx="minor"/>
+        </p:style>
+        <p:txBody>
+          <a:bodyPr lIns="90000" tIns="45000" rIns="90000" bIns="45000" anchor="ctr">
+            <a:noAutofit/>
+          </a:bodyPr>
+          <a:lstStyle/>
+          <a:p>
+            <a:pPr algn="ctr" defTabSz="457200">
+              <a:lnSpc>
+                <a:spcPct val="100000"/>
+              </a:lnSpc>
+            </a:pPr>
+            <a:r>
+              <a:rPr lang="en-US" sz="4400" b="0" u="none" strike="noStrike">
+                <a:solidFill>
+                  <a:srgbClr val="EA7500"/>
+                </a:solidFill>
+                <a:effectLst/>
+                <a:uFillTx/>
+                <a:latin typeface="Calibri"/>
+              </a:rPr>
+              <a:t>Realizações da Sprint</a:t>
+            </a:r>
+            <a:endParaRPr lang="pt-BR" sz="4400" b="0" u="none" strike="noStrike">
+              <a:solidFill>
+                <a:srgbClr val="000000"/>
+              </a:solidFill>
+              <a:effectLst/>
+              <a:uFillTx/>
+              <a:latin typeface="Arial"/>
+            </a:endParaRPr>
+          </a:p>
+        </p:txBody>
+      </p:sp>
+    </p:spTree>
+  </p:cSld>
+  <p:clrMapOvr>
+    <a:masterClrMapping/>
+  </p:clrMapOvr>
+</p:sld>
+</file>
+
+<file path=ppt/slides/slide38.xml><?xml version="1.0" encoding="utf-8"?>
+<p:sld xmlns:a="http://schemas.openxmlformats.org/drawingml/2006/main" xmlns:p="http://schemas.openxmlformats.org/presentationml/2006/main" xmlns:r="http://schemas.openxmlformats.org/officeDocument/2006/relationships">
+  <p:cSld>
+    <p:spTree>
+      <p:nvGrpSpPr>
+        <p:cNvPr id="1" name=""/>
+        <p:cNvGrpSpPr/>
+        <p:nvPr/>
+      </p:nvGrpSpPr>
+      <p:grpSpPr/>
+      <p:sp>
+        <p:nvSpPr>
+          <p:cNvPr id="71" name="PlaceHolder 1"/>
+          <p:cNvSpPr>
+            <a:spLocks noGrp="1"/>
+          </p:cNvSpPr>
+          <p:nvPr>
+            <p:ph/>
+          </p:nvPr>
+        </p:nvSpPr>
+        <p:spPr>
+          <a:xfrm>
+            <a:off x="411120" y="1321560"/>
+            <a:ext cx="8228160" cy="4637520"/>
+          </a:xfrm>
+          <a:prstGeom prst="rect">
+            <a:avLst/>
+          </a:prstGeom>
+          <a:noFill/>
+          <a:ln w="0">
+            <a:noFill/>
+          </a:ln>
+        </p:spPr>
+        <p:txBody>
+          <a:bodyPr lIns="91440" tIns="45720" rIns="91440" bIns="45720" anchor="t">
+            <a:noAutofit/>
+          </a:bodyPr>
+          <a:lstStyle/>
+          <a:p>
+            <a:pPr indent="0" algn="l" defTabSz="457200">
+              <a:lnSpc>
+                <a:spcPct val="100000"/>
+              </a:lnSpc>
+              <a:spcBef>
+                <a:spcPts val="641"/>
+              </a:spcBef>
+              <a:buNone/>
+              <a:tabLst>
+                <a:tab pos="0" algn="l"/>
+              </a:tabLst>
+            </a:pPr>
+            <a:endParaRPr lang="en-US" sz="3200" b="0" u="none" strike="noStrike" dirty="0">
+              <a:solidFill>
+                <a:schemeClr val="dk1"/>
+              </a:solidFill>
+              <a:effectLst/>
+              <a:uFillTx/>
+              <a:latin typeface="Calibri"/>
+            </a:endParaRPr>
+          </a:p>
+          <a:p>
+            <a:pPr marL="343080" indent="0" algn="l" defTabSz="457200">
+              <a:lnSpc>
+                <a:spcPct val="100000"/>
+              </a:lnSpc>
+              <a:spcBef>
+                <a:spcPts val="641"/>
+              </a:spcBef>
+              <a:buNone/>
+              <a:tabLst>
+                <a:tab pos="0" algn="l"/>
+              </a:tabLst>
+            </a:pPr>
+            <a:r>
+              <a:rPr lang="en-US" sz="3200" b="0" u="none" strike="noStrike" dirty="0">
+                <a:solidFill>
+                  <a:schemeClr val="dk1"/>
+                </a:solidFill>
+                <a:effectLst/>
+                <a:uFillTx/>
+                <a:latin typeface="Calibri"/>
+              </a:rPr>
+              <a:t/>
+            </a:r>
+            <a:r>
+              <a:rPr lang="en-US" sz="3200" b="0" u="none" strike="noStrike" dirty="0" err="1">
+                <a:solidFill>
+                  <a:schemeClr val="dk1"/>
+                </a:solidFill>
+                <a:effectLst/>
+                <a:uFillTx/>
+                <a:latin typeface="Calibri"/>
+              </a:rPr>
+              <a:t/>
+            </a:r>
+            <a:r>
+              <a:rPr lang="en-US" sz="3200" b="0" u="none" strike="noStrike" dirty="0">
+                <a:solidFill>
+                  <a:schemeClr val="dk1"/>
+                </a:solidFill>
+                <a:effectLst/>
+                <a:uFillTx/>
+                <a:latin typeface="Calibri"/>
+              </a:rPr>
+              <a:t/>
+            </a:r>
+          </a:p>
+          <a:p>
+            <a:pPr marL="343080" indent="-343080" algn="l" defTabSz="457200">
+              <a:lnSpc>
+                <a:spcPct val="100000"/>
+              </a:lnSpc>
+              <a:spcBef>
+                <a:spcPts val="641"/>
+              </a:spcBef>
+              <a:buClr>
+                <a:srgbClr val="000000"/>
+              </a:buClr>
+              <a:buSzPct val="45000"/>
+              <a:buFont typeface="Wingdings" charset="2"/>
+              <a:buChar char=""/>
+              <a:tabLst>
+                <a:tab pos="0" algn="l"/>
+              </a:tabLst>
+            </a:pPr>
+            <a:r>
+              <a:rPr lang="en-US" sz="2600" b="1" u="none" strike="noStrike" dirty="0">
+                <a:solidFill>
+                  <a:schemeClr val="tx2"/>
+                </a:solidFill>
+                <a:effectLst/>
+                <a:uFillTx/>
+                <a:latin typeface="Calibri"/>
+              </a:rPr>
+              <a:t>Processo gerente — Geração automatizada de sprint report com gráfico de cobertura ponderada</a:t>
+            </a:r>
+            <a:r>
+              <a:rPr lang="en-US" sz="2600" b="1" u="none" strike="noStrike" dirty="0" err="1">
+                <a:solidFill>
+                  <a:schemeClr val="tx2"/>
+                </a:solidFill>
+                <a:effectLst/>
+                <a:uFillTx/>
+                <a:latin typeface="Calibri"/>
+              </a:rPr>
+              <a:t/>
+            </a:r>
+            <a:r>
+              <a:rPr lang="en-US" sz="2600" b="1" u="none" strike="noStrike" dirty="0">
+                <a:solidFill>
+                  <a:schemeClr val="tx2"/>
+                </a:solidFill>
+                <a:effectLst/>
+                <a:uFillTx/>
+                <a:latin typeface="Calibri"/>
+              </a:rPr>
+              <a:t/>
+            </a:r>
+          </a:p>
+          <a:p>
+            <a:pPr marL="540000" lvl="1" algn="l" defTabSz="457200">
+              <a:lnSpc>
+                <a:spcPct val="100000"/>
+              </a:lnSpc>
+              <a:spcBef>
+                <a:spcPts val="561"/>
+              </a:spcBef>
+              <a:buClr>
+                <a:srgbClr val="000000"/>
+              </a:buClr>
+              <a:buSzPct val="45000"/>
+              <a:tabLst>
+                <a:tab pos="0" algn="l"/>
+              </a:tabLst>
+            </a:pPr>
+            <a:r>
+              <a:rPr lang="en-US" sz="2600" b="1" u="none" strike="noStrike" dirty="0" err="1">
+                <a:solidFill>
+                  <a:schemeClr val="dk1"/>
+                </a:solidFill>
+                <a:effectLst/>
+                <a:uFillTx/>
+                <a:latin typeface="Calibri"/>
+                <a:ea typeface="Microsoft YaHei"/>
+              </a:rPr>
+              <a:t>Requisitos</a:t>
+            </a:r>
+            <a:r>
+              <a:rPr lang="en-US" sz="2600" b="1" u="none" strike="noStrike" dirty="0">
+                <a:solidFill>
+                  <a:schemeClr val="dk1"/>
+                </a:solidFill>
+                <a:effectLst/>
+                <a:uFillTx/>
+                <a:latin typeface="Calibri"/>
+                <a:ea typeface="Microsoft YaHei"/>
+              </a:rPr>
+              <a:t> </a:t>
+            </a:r>
+            <a:r>
+              <a:rPr lang="en-US" sz="2600" b="1" u="none" strike="noStrike" dirty="0" err="1">
+                <a:solidFill>
+                  <a:schemeClr val="dk1"/>
+                </a:solidFill>
+                <a:effectLst/>
+                <a:uFillTx/>
+                <a:latin typeface="Calibri"/>
+                <a:ea typeface="Microsoft YaHei"/>
+              </a:rPr>
+              <a:t>envolvidos</a:t>
+            </a:r>
+            <a:r>
+              <a:rPr lang="en-US" sz="2600" b="0" u="none" strike="noStrike" dirty="0">
+                <a:solidFill>
+                  <a:schemeClr val="dk1"/>
+                </a:solidFill>
+                <a:effectLst/>
+                <a:uFillTx/>
+                <a:latin typeface="Calibri"/>
+                <a:ea typeface="Microsoft YaHei"/>
+              </a:rPr>
+              <a:t>: -</a:t>
+            </a:r>
+            <a:r>
+              <a:rPr lang="en-US" sz="2600" b="0" u="none" strike="noStrike" dirty="0" err="1">
+                <a:solidFill>
+                  <a:schemeClr val="dk1"/>
+                </a:solidFill>
+                <a:effectLst/>
+                <a:uFillTx/>
+                <a:latin typeface="Calibri"/>
+                <a:ea typeface="Microsoft YaHei"/>
+              </a:rPr>
+              <a:t/>
+            </a:r>
+            <a:r>
+              <a:rPr lang="en-US" sz="2600" dirty="0" err="1">
+                <a:solidFill>
+                  <a:schemeClr val="dk1"/>
+                </a:solidFill>
+                <a:latin typeface="Calibri"/>
+                <a:ea typeface="Microsoft YaHei"/>
+              </a:rPr>
+              <a:t/>
+            </a:r>
+            <a:r>
+              <a:rPr lang="en-US" sz="2600" b="0" u="none" strike="noStrike" dirty="0">
+                <a:solidFill>
+                  <a:schemeClr val="dk1"/>
+                </a:solidFill>
+                <a:effectLst/>
+                <a:uFillTx/>
+                <a:latin typeface="Calibri"/>
+                <a:ea typeface="Microsoft YaHei"/>
+              </a:rPr>
+              <a:t/>
+            </a:r>
+          </a:p>
+          <a:p>
+            <a:pPr marL="540000" lvl="1" algn="l" defTabSz="457200">
+              <a:lnSpc>
+                <a:spcPct val="100000"/>
+              </a:lnSpc>
+              <a:spcBef>
+                <a:spcPts val="561"/>
+              </a:spcBef>
+              <a:buClr>
+                <a:srgbClr val="000000"/>
+              </a:buClr>
+              <a:buSzPct val="45000"/>
+              <a:tabLst>
+                <a:tab pos="0" algn="l"/>
+              </a:tabLst>
+            </a:pPr>
+            <a:endParaRPr lang="en-US" sz="1100" dirty="0">
+              <a:solidFill>
+                <a:schemeClr val="dk1"/>
+              </a:solidFill>
+              <a:latin typeface="Calibri"/>
+              <a:ea typeface="Microsoft YaHei"/>
+            </a:endParaRPr>
+          </a:p>
+          <a:p>
+            <a:pPr marL="540000" lvl="1" algn="l" defTabSz="457200">
+              <a:lnSpc>
+                <a:spcPct val="100000"/>
+              </a:lnSpc>
+              <a:spcBef>
+                <a:spcPts val="561"/>
+              </a:spcBef>
+              <a:buClr>
+                <a:srgbClr val="000000"/>
+              </a:buClr>
+              <a:buSzPct val="45000"/>
+              <a:tabLst>
+                <a:tab pos="0" algn="l"/>
+              </a:tabLst>
+            </a:pPr>
+            <a:r>
+              <a:rPr lang="en-US" sz="2600" b="1" dirty="0" err="1">
+                <a:solidFill>
+                  <a:schemeClr val="dk1"/>
+                </a:solidFill>
+                <a:latin typeface="Calibri"/>
+                <a:ea typeface="Microsoft YaHei"/>
+              </a:rPr>
+              <a:t>Porcentagem</a:t>
+            </a:r>
+            <a:r>
+              <a:rPr lang="en-US" sz="2600" b="1" dirty="0">
+                <a:solidFill>
+                  <a:schemeClr val="dk1"/>
+                </a:solidFill>
+                <a:latin typeface="Calibri"/>
+                <a:ea typeface="Microsoft YaHei"/>
+              </a:rPr>
+              <a:t> de </a:t>
+            </a:r>
+            <a:r>
+              <a:rPr lang="en-US" sz="2600" b="1" dirty="0" err="1">
+                <a:solidFill>
+                  <a:schemeClr val="dk1"/>
+                </a:solidFill>
+                <a:latin typeface="Calibri"/>
+                <a:ea typeface="Microsoft YaHei"/>
+              </a:rPr>
+              <a:t>cobertura</a:t>
+            </a:r>
+            <a:r>
+              <a:rPr lang="en-US" sz="2600" b="1" dirty="0">
+                <a:solidFill>
+                  <a:schemeClr val="dk1"/>
+                </a:solidFill>
+                <a:latin typeface="Calibri"/>
+                <a:ea typeface="Microsoft YaHei"/>
+              </a:rPr>
+              <a:t> </a:t>
+            </a:r>
+            <a:r>
+              <a:rPr lang="en-US" sz="2600" b="1" dirty="0" err="1">
+                <a:solidFill>
+                  <a:schemeClr val="dk1"/>
+                </a:solidFill>
+                <a:latin typeface="Calibri"/>
+                <a:ea typeface="Microsoft YaHei"/>
+              </a:rPr>
+              <a:t>por</a:t>
+            </a:r>
+            <a:r>
+              <a:rPr lang="en-US" sz="2600" b="1" dirty="0">
+                <a:solidFill>
+                  <a:schemeClr val="dk1"/>
+                </a:solidFill>
+                <a:latin typeface="Calibri"/>
+                <a:ea typeface="Microsoft YaHei"/>
+              </a:rPr>
+              <a:t> </a:t>
+            </a:r>
+            <a:r>
+              <a:rPr lang="en-US" sz="2600" b="1" dirty="0" err="1">
+                <a:solidFill>
+                  <a:schemeClr val="dk1"/>
+                </a:solidFill>
+                <a:latin typeface="Calibri"/>
+                <a:ea typeface="Microsoft YaHei"/>
+              </a:rPr>
+              <a:t>requisito</a:t>
+            </a:r>
+            <a:r>
+              <a:rPr lang="en-US" sz="2600" dirty="0">
+                <a:solidFill>
+                  <a:schemeClr val="dk1"/>
+                </a:solidFill>
+                <a:latin typeface="Calibri"/>
+                <a:ea typeface="Microsoft YaHei"/>
+              </a:rPr>
+              <a:t>:</a:t>
+            </a:r>
+            <a:endParaRPr lang="en-US" sz="2600" b="0" u="none" strike="noStrike" dirty="0">
+              <a:solidFill>
+                <a:schemeClr val="dk1"/>
+              </a:solidFill>
+              <a:effectLst/>
+              <a:uFillTx/>
+              <a:latin typeface="Calibri"/>
+            </a:endParaRPr>
+          </a:p>
+          <a:p>
+            <a:pPr marL="864000" lvl="1" indent="-324000" algn="l" defTabSz="457200">
+              <a:lnSpc>
+                <a:spcPct val="100000"/>
+              </a:lnSpc>
+              <a:spcBef>
+                <a:spcPts val="561"/>
+              </a:spcBef>
+              <a:buClr>
+                <a:srgbClr val="000000"/>
+              </a:buClr>
+              <a:buSzPct val="45000"/>
+              <a:buFont typeface="Wingdings" charset="2"/>
+              <a:buChar char=""/>
+              <a:tabLst>
+                <a:tab pos="0" algn="l"/>
+              </a:tabLst>
+            </a:pPr>
+            <a:r>
+              <a:rPr lang="en-US" sz="2600" b="0" u="none" strike="noStrike" dirty="0">
+                <a:solidFill>
+                  <a:schemeClr val="dk1"/>
+                </a:solidFill>
+                <a:effectLst/>
+                <a:uFillTx/>
+                <a:latin typeface="Calibri"/>
+                <a:ea typeface="Microsoft YaHei"/>
+              </a:rPr>
+              <a:t>obs: governanca; gera_grafico_cobertura_ponderada.py + atualiza_cobertura_evolucao.py</a:t>
+            </a:r>
+            <a:r>
+              <a:rPr lang="en-US" sz="2600" b="0" u="none" strike="noStrike" dirty="0" err="1">
+                <a:solidFill>
+                  <a:schemeClr val="dk1"/>
+                </a:solidFill>
+                <a:effectLst/>
+                <a:uFillTx/>
+                <a:latin typeface="Calibri"/>
+                <a:ea typeface="Microsoft YaHei"/>
+              </a:rPr>
+              <a:t/>
+            </a:r>
+            <a:r>
+              <a:rPr lang="en-US" sz="2600" dirty="0" err="1">
+                <a:solidFill>
+                  <a:schemeClr val="dk1"/>
+                </a:solidFill>
+                <a:latin typeface="Calibri"/>
+                <a:ea typeface="Microsoft YaHei"/>
+              </a:rPr>
+              <a:t/>
+            </a:r>
+            <a:r>
+              <a:rPr lang="en-US" sz="2600" b="0" u="none" strike="noStrike" dirty="0" err="1">
+                <a:solidFill>
+                  <a:schemeClr val="dk1"/>
+                </a:solidFill>
+                <a:effectLst/>
+                <a:uFillTx/>
+                <a:latin typeface="Calibri"/>
+                <a:ea typeface="Microsoft YaHei"/>
+              </a:rPr>
+              <a:t/>
+            </a:r>
+            <a:r>
+              <a:rPr lang="en-US" sz="2600" b="0" u="none" strike="noStrike" dirty="0">
+                <a:solidFill>
+                  <a:schemeClr val="dk1"/>
+                </a:solidFill>
+                <a:effectLst/>
+                <a:uFillTx/>
+                <a:latin typeface="Calibri"/>
+                <a:ea typeface="Microsoft YaHei"/>
+              </a:rPr>
+              <a:t/>
+            </a:r>
+            <a:endParaRPr lang="en-US" sz="2600" b="0" u="none" strike="noStrike" dirty="0">
+              <a:solidFill>
+                <a:schemeClr val="dk1"/>
+              </a:solidFill>
+              <a:effectLst/>
+              <a:uFillTx/>
+              <a:latin typeface="Calibri"/>
+            </a:endParaRPr>
+          </a:p>
+        </p:txBody>
+      </p:sp>
+      <p:pic>
+        <p:nvPicPr>
+          <p:cNvPr id="72" name="Imagem 71"/>
+          <p:cNvPicPr/>
+          <p:nvPr/>
+        </p:nvPicPr>
+        <p:blipFill>
+          <a:blip r:embed="rId2"/>
+          <a:stretch/>
+        </p:blipFill>
+        <p:spPr>
+          <a:xfrm>
+            <a:off x="720" y="-28800"/>
+            <a:ext cx="9142560" cy="1647720"/>
+          </a:xfrm>
+          <a:prstGeom prst="rect">
+            <a:avLst/>
+          </a:prstGeom>
+          <a:noFill/>
+          <a:ln w="0">
+            <a:noFill/>
+          </a:ln>
+        </p:spPr>
+      </p:pic>
+      <p:sp>
+        <p:nvSpPr>
+          <p:cNvPr id="73" name="Title 3"/>
+          <p:cNvSpPr/>
+          <p:nvPr/>
+        </p:nvSpPr>
+        <p:spPr>
+          <a:xfrm>
+            <a:off x="915480" y="180000"/>
+            <a:ext cx="8228160" cy="1141560"/>
+          </a:xfrm>
+          <a:prstGeom prst="rect">
+            <a:avLst/>
+          </a:prstGeom>
+          <a:noFill/>
+          <a:ln w="0">
+            <a:noFill/>
+          </a:ln>
+        </p:spPr>
+        <p:style>
+          <a:lnRef idx="0">
+            <a:scrgbClr r="0" g="0" b="0"/>
+          </a:lnRef>
+          <a:fillRef idx="0">
+            <a:scrgbClr r="0" g="0" b="0"/>
+          </a:fillRef>
+          <a:effectRef idx="0">
+            <a:scrgbClr r="0" g="0" b="0"/>
+          </a:effectRef>
+          <a:fontRef idx="minor"/>
+        </p:style>
+        <p:txBody>
+          <a:bodyPr lIns="90000" tIns="45000" rIns="90000" bIns="45000" anchor="ctr">
+            <a:noAutofit/>
+          </a:bodyPr>
+          <a:lstStyle/>
+          <a:p>
+            <a:pPr algn="ctr" defTabSz="457200">
+              <a:lnSpc>
+                <a:spcPct val="100000"/>
+              </a:lnSpc>
+            </a:pPr>
+            <a:r>
+              <a:rPr lang="en-US" sz="4400" b="0" u="none" strike="noStrike">
+                <a:solidFill>
+                  <a:srgbClr val="EA7500"/>
+                </a:solidFill>
+                <a:effectLst/>
+                <a:uFillTx/>
+                <a:latin typeface="Calibri"/>
+              </a:rPr>
+              <a:t>Realizações da Sprint</a:t>
+            </a:r>
+            <a:endParaRPr lang="pt-BR" sz="4400" b="0" u="none" strike="noStrike">
+              <a:solidFill>
+                <a:srgbClr val="000000"/>
+              </a:solidFill>
+              <a:effectLst/>
+              <a:uFillTx/>
+              <a:latin typeface="Arial"/>
+            </a:endParaRPr>
+          </a:p>
+        </p:txBody>
+      </p:sp>
+    </p:spTree>
+  </p:cSld>
+  <p:clrMapOvr>
+    <a:masterClrMapping/>
+  </p:clrMapOvr>
+</p:sld>
+</file>
+
+<file path=ppt/slides/slide39.xml><?xml version="1.0" encoding="utf-8"?>
+<p:sld xmlns:a="http://schemas.openxmlformats.org/drawingml/2006/main" xmlns:p="http://schemas.openxmlformats.org/presentationml/2006/main" xmlns:r="http://schemas.openxmlformats.org/officeDocument/2006/relationships">
+  <p:cSld>
+    <p:spTree>
+      <p:nvGrpSpPr>
+        <p:cNvPr id="1" name=""/>
+        <p:cNvGrpSpPr/>
+        <p:nvPr/>
+      </p:nvGrpSpPr>
+      <p:grpSpPr/>
+      <p:sp>
+        <p:nvSpPr>
+          <p:cNvPr id="71" name="PlaceHolder 1"/>
+          <p:cNvSpPr>
+            <a:spLocks noGrp="1"/>
+          </p:cNvSpPr>
+          <p:nvPr>
+            <p:ph/>
+          </p:nvPr>
+        </p:nvSpPr>
+        <p:spPr>
+          <a:xfrm>
+            <a:off x="411120" y="1321560"/>
+            <a:ext cx="8228160" cy="4637520"/>
+          </a:xfrm>
+          <a:prstGeom prst="rect">
+            <a:avLst/>
+          </a:prstGeom>
+          <a:noFill/>
+          <a:ln w="0">
+            <a:noFill/>
+          </a:ln>
+        </p:spPr>
+        <p:txBody>
+          <a:bodyPr lIns="91440" tIns="45720" rIns="91440" bIns="45720" anchor="t">
+            <a:noAutofit/>
+          </a:bodyPr>
+          <a:lstStyle/>
+          <a:p>
+            <a:pPr indent="0" algn="l" defTabSz="457200">
+              <a:lnSpc>
+                <a:spcPct val="100000"/>
+              </a:lnSpc>
+              <a:spcBef>
+                <a:spcPts val="641"/>
+              </a:spcBef>
+              <a:buNone/>
+              <a:tabLst>
+                <a:tab pos="0" algn="l"/>
+              </a:tabLst>
+            </a:pPr>
+            <a:endParaRPr lang="en-US" sz="3200" b="0" u="none" strike="noStrike" dirty="0">
+              <a:solidFill>
+                <a:schemeClr val="dk1"/>
+              </a:solidFill>
+              <a:effectLst/>
+              <a:uFillTx/>
+              <a:latin typeface="Calibri"/>
+            </a:endParaRPr>
+          </a:p>
+          <a:p>
+            <a:pPr marL="343080" indent="0" algn="l" defTabSz="457200">
+              <a:lnSpc>
+                <a:spcPct val="100000"/>
+              </a:lnSpc>
+              <a:spcBef>
+                <a:spcPts val="641"/>
+              </a:spcBef>
+              <a:buNone/>
+              <a:tabLst>
+                <a:tab pos="0" algn="l"/>
+              </a:tabLst>
+            </a:pPr>
+            <a:r>
+              <a:rPr lang="en-US" sz="3200" b="0" u="none" strike="noStrike" dirty="0">
+                <a:solidFill>
+                  <a:schemeClr val="dk1"/>
+                </a:solidFill>
+                <a:effectLst/>
+                <a:uFillTx/>
+                <a:latin typeface="Calibri"/>
+              </a:rPr>
+              <a:t/>
+            </a:r>
+            <a:r>
+              <a:rPr lang="en-US" sz="3200" b="0" u="none" strike="noStrike" dirty="0" err="1">
+                <a:solidFill>
+                  <a:schemeClr val="dk1"/>
+                </a:solidFill>
+                <a:effectLst/>
+                <a:uFillTx/>
+                <a:latin typeface="Calibri"/>
+              </a:rPr>
+              <a:t/>
+            </a:r>
+            <a:r>
+              <a:rPr lang="en-US" sz="3200" b="0" u="none" strike="noStrike" dirty="0">
+                <a:solidFill>
+                  <a:schemeClr val="dk1"/>
+                </a:solidFill>
+                <a:effectLst/>
+                <a:uFillTx/>
+                <a:latin typeface="Calibri"/>
+              </a:rPr>
+              <a:t/>
+            </a:r>
+          </a:p>
+          <a:p>
+            <a:pPr marL="343080" indent="-343080" algn="l" defTabSz="457200">
+              <a:lnSpc>
+                <a:spcPct val="100000"/>
+              </a:lnSpc>
+              <a:spcBef>
+                <a:spcPts val="641"/>
+              </a:spcBef>
+              <a:buClr>
+                <a:srgbClr val="000000"/>
+              </a:buClr>
+              <a:buSzPct val="45000"/>
+              <a:buFont typeface="Wingdings" charset="2"/>
+              <a:buChar char=""/>
+              <a:tabLst>
+                <a:tab pos="0" algn="l"/>
+              </a:tabLst>
+            </a:pPr>
+            <a:r>
+              <a:rPr lang="en-US" sz="2600" b="1" u="none" strike="noStrike" dirty="0">
+                <a:solidFill>
+                  <a:schemeClr val="tx2"/>
+                </a:solidFill>
+                <a:effectLst/>
+                <a:uFillTx/>
+                <a:latin typeface="Calibri"/>
+              </a:rPr>
+              <a:t>Processo QA — QA Runner + cópia de contexto no painel administrativo</a:t>
+            </a:r>
+            <a:r>
+              <a:rPr lang="en-US" sz="2600" b="1" u="none" strike="noStrike" dirty="0" err="1">
+                <a:solidFill>
+                  <a:schemeClr val="tx2"/>
+                </a:solidFill>
+                <a:effectLst/>
+                <a:uFillTx/>
+                <a:latin typeface="Calibri"/>
+              </a:rPr>
+              <a:t/>
+            </a:r>
+            <a:r>
+              <a:rPr lang="en-US" sz="2600" b="1" u="none" strike="noStrike" dirty="0">
+                <a:solidFill>
+                  <a:schemeClr val="tx2"/>
+                </a:solidFill>
+                <a:effectLst/>
+                <a:uFillTx/>
+                <a:latin typeface="Calibri"/>
+              </a:rPr>
+              <a:t/>
+            </a:r>
+          </a:p>
+          <a:p>
+            <a:pPr marL="540000" lvl="1" algn="l" defTabSz="457200">
+              <a:lnSpc>
+                <a:spcPct val="100000"/>
+              </a:lnSpc>
+              <a:spcBef>
+                <a:spcPts val="561"/>
+              </a:spcBef>
+              <a:buClr>
+                <a:srgbClr val="000000"/>
+              </a:buClr>
+              <a:buSzPct val="45000"/>
+              <a:tabLst>
+                <a:tab pos="0" algn="l"/>
+              </a:tabLst>
+            </a:pPr>
+            <a:r>
+              <a:rPr lang="en-US" sz="2600" b="1" u="none" strike="noStrike" dirty="0" err="1">
+                <a:solidFill>
+                  <a:schemeClr val="dk1"/>
+                </a:solidFill>
+                <a:effectLst/>
+                <a:uFillTx/>
+                <a:latin typeface="Calibri"/>
+                <a:ea typeface="Microsoft YaHei"/>
+              </a:rPr>
+              <a:t>Requisitos</a:t>
+            </a:r>
+            <a:r>
+              <a:rPr lang="en-US" sz="2600" b="1" u="none" strike="noStrike" dirty="0">
+                <a:solidFill>
+                  <a:schemeClr val="dk1"/>
+                </a:solidFill>
+                <a:effectLst/>
+                <a:uFillTx/>
+                <a:latin typeface="Calibri"/>
+                <a:ea typeface="Microsoft YaHei"/>
+              </a:rPr>
+              <a:t> </a:t>
+            </a:r>
+            <a:r>
+              <a:rPr lang="en-US" sz="2600" b="1" u="none" strike="noStrike" dirty="0" err="1">
+                <a:solidFill>
+                  <a:schemeClr val="dk1"/>
+                </a:solidFill>
+                <a:effectLst/>
+                <a:uFillTx/>
+                <a:latin typeface="Calibri"/>
+                <a:ea typeface="Microsoft YaHei"/>
+              </a:rPr>
+              <a:t>envolvidos</a:t>
+            </a:r>
+            <a:r>
+              <a:rPr lang="en-US" sz="2600" b="0" u="none" strike="noStrike" dirty="0">
+                <a:solidFill>
+                  <a:schemeClr val="dk1"/>
+                </a:solidFill>
+                <a:effectLst/>
+                <a:uFillTx/>
+                <a:latin typeface="Calibri"/>
+                <a:ea typeface="Microsoft YaHei"/>
+              </a:rPr>
+              <a:t>: REQ-010</a:t>
+            </a:r>
+            <a:r>
+              <a:rPr lang="en-US" sz="2600" b="0" u="none" strike="noStrike" dirty="0" err="1">
+                <a:solidFill>
+                  <a:schemeClr val="dk1"/>
+                </a:solidFill>
+                <a:effectLst/>
+                <a:uFillTx/>
+                <a:latin typeface="Calibri"/>
+                <a:ea typeface="Microsoft YaHei"/>
+              </a:rPr>
+              <a:t/>
+            </a:r>
+            <a:r>
+              <a:rPr lang="en-US" sz="2600" dirty="0" err="1">
+                <a:solidFill>
+                  <a:schemeClr val="dk1"/>
+                </a:solidFill>
+                <a:latin typeface="Calibri"/>
+                <a:ea typeface="Microsoft YaHei"/>
+              </a:rPr>
+              <a:t/>
+            </a:r>
+            <a:r>
+              <a:rPr lang="en-US" sz="2600" b="0" u="none" strike="noStrike" dirty="0">
+                <a:solidFill>
+                  <a:schemeClr val="dk1"/>
+                </a:solidFill>
+                <a:effectLst/>
+                <a:uFillTx/>
+                <a:latin typeface="Calibri"/>
+                <a:ea typeface="Microsoft YaHei"/>
+              </a:rPr>
+              <a:t/>
+            </a:r>
+          </a:p>
+          <a:p>
+            <a:pPr marL="540000" lvl="1" algn="l" defTabSz="457200">
+              <a:lnSpc>
+                <a:spcPct val="100000"/>
+              </a:lnSpc>
+              <a:spcBef>
+                <a:spcPts val="561"/>
+              </a:spcBef>
+              <a:buClr>
+                <a:srgbClr val="000000"/>
+              </a:buClr>
+              <a:buSzPct val="45000"/>
+              <a:tabLst>
+                <a:tab pos="0" algn="l"/>
+              </a:tabLst>
+            </a:pPr>
+            <a:endParaRPr lang="en-US" sz="1100" dirty="0">
+              <a:solidFill>
+                <a:schemeClr val="dk1"/>
+              </a:solidFill>
+              <a:latin typeface="Calibri"/>
+              <a:ea typeface="Microsoft YaHei"/>
+            </a:endParaRPr>
+          </a:p>
+          <a:p>
+            <a:pPr marL="540000" lvl="1" algn="l" defTabSz="457200">
+              <a:lnSpc>
+                <a:spcPct val="100000"/>
+              </a:lnSpc>
+              <a:spcBef>
+                <a:spcPts val="561"/>
+              </a:spcBef>
+              <a:buClr>
+                <a:srgbClr val="000000"/>
+              </a:buClr>
+              <a:buSzPct val="45000"/>
+              <a:tabLst>
+                <a:tab pos="0" algn="l"/>
+              </a:tabLst>
+            </a:pPr>
+            <a:r>
+              <a:rPr lang="en-US" sz="2600" b="1" dirty="0" err="1">
+                <a:solidFill>
+                  <a:schemeClr val="dk1"/>
+                </a:solidFill>
+                <a:latin typeface="Calibri"/>
+                <a:ea typeface="Microsoft YaHei"/>
+              </a:rPr>
+              <a:t>Porcentagem</a:t>
+            </a:r>
+            <a:r>
+              <a:rPr lang="en-US" sz="2600" b="1" dirty="0">
+                <a:solidFill>
+                  <a:schemeClr val="dk1"/>
+                </a:solidFill>
+                <a:latin typeface="Calibri"/>
+                <a:ea typeface="Microsoft YaHei"/>
+              </a:rPr>
+              <a:t> de </a:t>
+            </a:r>
+            <a:r>
+              <a:rPr lang="en-US" sz="2600" b="1" dirty="0" err="1">
+                <a:solidFill>
+                  <a:schemeClr val="dk1"/>
+                </a:solidFill>
+                <a:latin typeface="Calibri"/>
+                <a:ea typeface="Microsoft YaHei"/>
+              </a:rPr>
+              <a:t>cobertura</a:t>
+            </a:r>
+            <a:r>
+              <a:rPr lang="en-US" sz="2600" b="1" dirty="0">
+                <a:solidFill>
+                  <a:schemeClr val="dk1"/>
+                </a:solidFill>
+                <a:latin typeface="Calibri"/>
+                <a:ea typeface="Microsoft YaHei"/>
+              </a:rPr>
+              <a:t> </a:t>
+            </a:r>
+            <a:r>
+              <a:rPr lang="en-US" sz="2600" b="1" dirty="0" err="1">
+                <a:solidFill>
+                  <a:schemeClr val="dk1"/>
+                </a:solidFill>
+                <a:latin typeface="Calibri"/>
+                <a:ea typeface="Microsoft YaHei"/>
+              </a:rPr>
+              <a:t>por</a:t>
+            </a:r>
+            <a:r>
+              <a:rPr lang="en-US" sz="2600" b="1" dirty="0">
+                <a:solidFill>
+                  <a:schemeClr val="dk1"/>
+                </a:solidFill>
+                <a:latin typeface="Calibri"/>
+                <a:ea typeface="Microsoft YaHei"/>
+              </a:rPr>
+              <a:t> </a:t>
+            </a:r>
+            <a:r>
+              <a:rPr lang="en-US" sz="2600" b="1" dirty="0" err="1">
+                <a:solidFill>
+                  <a:schemeClr val="dk1"/>
+                </a:solidFill>
+                <a:latin typeface="Calibri"/>
+                <a:ea typeface="Microsoft YaHei"/>
+              </a:rPr>
+              <a:t>requisito</a:t>
+            </a:r>
+            <a:r>
+              <a:rPr lang="en-US" sz="2600" dirty="0">
+                <a:solidFill>
+                  <a:schemeClr val="dk1"/>
+                </a:solidFill>
+                <a:latin typeface="Calibri"/>
+                <a:ea typeface="Microsoft YaHei"/>
+              </a:rPr>
+              <a:t>:</a:t>
+            </a:r>
+            <a:endParaRPr lang="en-US" sz="2600" b="0" u="none" strike="noStrike" dirty="0">
+              <a:solidFill>
+                <a:schemeClr val="dk1"/>
+              </a:solidFill>
+              <a:effectLst/>
+              <a:uFillTx/>
+              <a:latin typeface="Calibri"/>
+            </a:endParaRPr>
+          </a:p>
+          <a:p>
+            <a:pPr marL="864000" lvl="1" indent="-324000" algn="l" defTabSz="457200">
+              <a:lnSpc>
+                <a:spcPct val="100000"/>
+              </a:lnSpc>
+              <a:spcBef>
+                <a:spcPts val="561"/>
+              </a:spcBef>
+              <a:buClr>
+                <a:srgbClr val="000000"/>
+              </a:buClr>
+              <a:buSzPct val="45000"/>
+              <a:buFont typeface="Wingdings" charset="2"/>
+              <a:buChar char=""/>
+              <a:tabLst>
+                <a:tab pos="0" algn="l"/>
+              </a:tabLst>
+            </a:pPr>
+            <a:r>
+              <a:rPr lang="en-US" sz="2600" b="0" u="none" strike="noStrike" dirty="0">
+                <a:solidFill>
+                  <a:schemeClr val="dk1"/>
+                </a:solidFill>
+                <a:effectLst/>
+                <a:uFillTx/>
+                <a:latin typeface="Calibri"/>
+                <a:ea typeface="Microsoft YaHei"/>
+              </a:rPr>
+              <a:t>REQ-010: antes ~30%, depois ~35%, delta +5</a:t>
             </a:r>
             <a:r>
               <a:rPr lang="en-US" sz="2600" b="0" u="none" strike="noStrike" dirty="0" err="1">
@@ -22126,7 +25872,7 @@
                 <a:latin typeface="Calibri"/>
                 <a:ea typeface="Microsoft YaHei"/>
               </a:rPr>
-              <a:t>: ~34%</a:t>
+              <a:t>: ~38%</a:t>
             </a:r>
             <a:r>
               <a:rPr lang="en-US" sz="2400" dirty="0" err="1">
@@ -22182,7 +25928,7 @@
                 <a:latin typeface="Calibri"/>
                 <a:ea typeface="Microsoft YaHei"/>
               </a:rPr>
-              <a:t>: +12</a:t>
+              <a:t>: +16</a:t>
             </a:r>
             <a:r>
               <a:rPr lang="en-US" sz="2400" dirty="0" err="1">
@@ -22359,7 +26105,7 @@
                 <a:latin typeface="Calibri"/>
                 <a:ea typeface="Microsoft YaHei"/>
               </a:rPr>
-              <a:t>: 5</a:t>
+              <a:t>: 11</a:t>
             </a:r>
             <a:r>
               <a:rPr lang="en-US" sz="2400" dirty="0" err="1">
@@ -22445,7 +26191,7 @@
                 <a:latin typeface="Calibri"/>
                 <a:ea typeface="Microsoft YaHei"/>
               </a:rPr>
-              <a:t>: 3</a:t>
+              <a:t>: 5</a:t>
             </a:r>
             <a:r>
               <a:rPr lang="en-US" sz="2400" dirty="0" err="1">
@@ -22610,6 +26356,1716 @@
         <p14:creationId xmlns:p14="http://schemas.microsoft.com/office/powerpoint/2010/main" val="1057179183"/>
       </p:ext>
     </p:extLst>
+  </p:cSld>
+  <p:clrMapOvr>
+    <a:masterClrMapping/>
+  </p:clrMapOvr>
+</p:sld>
+</file>
+
+<file path=ppt/slides/slide40.xml><?xml version="1.0" encoding="utf-8"?>
+<p:sld xmlns:a="http://schemas.openxmlformats.org/drawingml/2006/main" xmlns:p="http://schemas.openxmlformats.org/presentationml/2006/main" xmlns:r="http://schemas.openxmlformats.org/officeDocument/2006/relationships">
+  <p:cSld>
+    <p:spTree>
+      <p:nvGrpSpPr>
+        <p:cNvPr id="1" name=""/>
+        <p:cNvGrpSpPr/>
+        <p:nvPr/>
+      </p:nvGrpSpPr>
+      <p:grpSpPr/>
+      <p:sp>
+        <p:nvSpPr>
+          <p:cNvPr id="71" name="PlaceHolder 1"/>
+          <p:cNvSpPr>
+            <a:spLocks noGrp="1"/>
+          </p:cNvSpPr>
+          <p:nvPr>
+            <p:ph/>
+          </p:nvPr>
+        </p:nvSpPr>
+        <p:spPr>
+          <a:xfrm>
+            <a:off x="411120" y="1321560"/>
+            <a:ext cx="8228160" cy="4637520"/>
+          </a:xfrm>
+          <a:prstGeom prst="rect">
+            <a:avLst/>
+          </a:prstGeom>
+          <a:noFill/>
+          <a:ln w="0">
+            <a:noFill/>
+          </a:ln>
+        </p:spPr>
+        <p:txBody>
+          <a:bodyPr lIns="91440" tIns="45720" rIns="91440" bIns="45720" anchor="t">
+            <a:noAutofit/>
+          </a:bodyPr>
+          <a:lstStyle/>
+          <a:p>
+            <a:pPr indent="0" algn="l" defTabSz="457200">
+              <a:lnSpc>
+                <a:spcPct val="100000"/>
+              </a:lnSpc>
+              <a:spcBef>
+                <a:spcPts val="641"/>
+              </a:spcBef>
+              <a:buNone/>
+              <a:tabLst>
+                <a:tab pos="0" algn="l"/>
+              </a:tabLst>
+            </a:pPr>
+            <a:endParaRPr lang="en-US" sz="3200" b="0" u="none" strike="noStrike" dirty="0">
+              <a:solidFill>
+                <a:schemeClr val="dk1"/>
+              </a:solidFill>
+              <a:effectLst/>
+              <a:uFillTx/>
+              <a:latin typeface="Calibri"/>
+            </a:endParaRPr>
+          </a:p>
+          <a:p>
+            <a:pPr marL="343080" indent="0" algn="l" defTabSz="457200">
+              <a:lnSpc>
+                <a:spcPct val="100000"/>
+              </a:lnSpc>
+              <a:spcBef>
+                <a:spcPts val="641"/>
+              </a:spcBef>
+              <a:buNone/>
+              <a:tabLst>
+                <a:tab pos="0" algn="l"/>
+              </a:tabLst>
+            </a:pPr>
+            <a:r>
+              <a:rPr lang="en-US" sz="3200" b="0" u="none" strike="noStrike" dirty="0">
+                <a:solidFill>
+                  <a:schemeClr val="dk1"/>
+                </a:solidFill>
+                <a:effectLst/>
+                <a:uFillTx/>
+                <a:latin typeface="Calibri"/>
+              </a:rPr>
+              <a:t/>
+            </a:r>
+            <a:r>
+              <a:rPr lang="en-US" sz="3200" b="0" u="none" strike="noStrike" dirty="0" err="1">
+                <a:solidFill>
+                  <a:schemeClr val="dk1"/>
+                </a:solidFill>
+                <a:effectLst/>
+                <a:uFillTx/>
+                <a:latin typeface="Calibri"/>
+              </a:rPr>
+              <a:t/>
+            </a:r>
+            <a:r>
+              <a:rPr lang="en-US" sz="3200" b="0" u="none" strike="noStrike" dirty="0">
+                <a:solidFill>
+                  <a:schemeClr val="dk1"/>
+                </a:solidFill>
+                <a:effectLst/>
+                <a:uFillTx/>
+                <a:latin typeface="Calibri"/>
+              </a:rPr>
+              <a:t/>
+            </a:r>
+          </a:p>
+          <a:p>
+            <a:pPr marL="343080" indent="-343080" algn="l" defTabSz="457200">
+              <a:lnSpc>
+                <a:spcPct val="100000"/>
+              </a:lnSpc>
+              <a:spcBef>
+                <a:spcPts val="641"/>
+              </a:spcBef>
+              <a:buClr>
+                <a:srgbClr val="000000"/>
+              </a:buClr>
+              <a:buSzPct val="45000"/>
+              <a:buFont typeface="Wingdings" charset="2"/>
+              <a:buChar char=""/>
+              <a:tabLst>
+                <a:tab pos="0" algn="l"/>
+              </a:tabLst>
+            </a:pPr>
+            <a:r>
+              <a:rPr lang="en-US" sz="2600" b="1" u="none" strike="noStrike" dirty="0">
+                <a:solidFill>
+                  <a:schemeClr val="tx2"/>
+                </a:solidFill>
+                <a:effectLst/>
+                <a:uFillTx/>
+                <a:latin typeface="Calibri"/>
+              </a:rPr>
+              <a:t>Infraestrutura — Tunnel Cloudflared para disponibilização do sistema em dev</a:t>
+            </a:r>
+            <a:r>
+              <a:rPr lang="en-US" sz="2600" b="1" u="none" strike="noStrike" dirty="0" err="1">
+                <a:solidFill>
+                  <a:schemeClr val="tx2"/>
+                </a:solidFill>
+                <a:effectLst/>
+                <a:uFillTx/>
+                <a:latin typeface="Calibri"/>
+              </a:rPr>
+              <a:t/>
+            </a:r>
+            <a:r>
+              <a:rPr lang="en-US" sz="2600" b="1" u="none" strike="noStrike" dirty="0">
+                <a:solidFill>
+                  <a:schemeClr val="tx2"/>
+                </a:solidFill>
+                <a:effectLst/>
+                <a:uFillTx/>
+                <a:latin typeface="Calibri"/>
+              </a:rPr>
+              <a:t/>
+            </a:r>
+          </a:p>
+          <a:p>
+            <a:pPr marL="540000" lvl="1" algn="l" defTabSz="457200">
+              <a:lnSpc>
+                <a:spcPct val="100000"/>
+              </a:lnSpc>
+              <a:spcBef>
+                <a:spcPts val="561"/>
+              </a:spcBef>
+              <a:buClr>
+                <a:srgbClr val="000000"/>
+              </a:buClr>
+              <a:buSzPct val="45000"/>
+              <a:tabLst>
+                <a:tab pos="0" algn="l"/>
+              </a:tabLst>
+            </a:pPr>
+            <a:r>
+              <a:rPr lang="en-US" sz="2600" b="1" u="none" strike="noStrike" dirty="0" err="1">
+                <a:solidFill>
+                  <a:schemeClr val="dk1"/>
+                </a:solidFill>
+                <a:effectLst/>
+                <a:uFillTx/>
+                <a:latin typeface="Calibri"/>
+                <a:ea typeface="Microsoft YaHei"/>
+              </a:rPr>
+              <a:t>Requisitos</a:t>
+            </a:r>
+            <a:r>
+              <a:rPr lang="en-US" sz="2600" b="1" u="none" strike="noStrike" dirty="0">
+                <a:solidFill>
+                  <a:schemeClr val="dk1"/>
+                </a:solidFill>
+                <a:effectLst/>
+                <a:uFillTx/>
+                <a:latin typeface="Calibri"/>
+                <a:ea typeface="Microsoft YaHei"/>
+              </a:rPr>
+              <a:t> </a:t>
+            </a:r>
+            <a:r>
+              <a:rPr lang="en-US" sz="2600" b="1" u="none" strike="noStrike" dirty="0" err="1">
+                <a:solidFill>
+                  <a:schemeClr val="dk1"/>
+                </a:solidFill>
+                <a:effectLst/>
+                <a:uFillTx/>
+                <a:latin typeface="Calibri"/>
+                <a:ea typeface="Microsoft YaHei"/>
+              </a:rPr>
+              <a:t>envolvidos</a:t>
+            </a:r>
+            <a:r>
+              <a:rPr lang="en-US" sz="2600" b="0" u="none" strike="noStrike" dirty="0">
+                <a:solidFill>
+                  <a:schemeClr val="dk1"/>
+                </a:solidFill>
+                <a:effectLst/>
+                <a:uFillTx/>
+                <a:latin typeface="Calibri"/>
+                <a:ea typeface="Microsoft YaHei"/>
+              </a:rPr>
+              <a:t>: REQ-008</a:t>
+            </a:r>
+            <a:r>
+              <a:rPr lang="en-US" sz="2600" b="0" u="none" strike="noStrike" dirty="0" err="1">
+                <a:solidFill>
+                  <a:schemeClr val="dk1"/>
+                </a:solidFill>
+                <a:effectLst/>
+                <a:uFillTx/>
+                <a:latin typeface="Calibri"/>
+                <a:ea typeface="Microsoft YaHei"/>
+              </a:rPr>
+              <a:t/>
+            </a:r>
+            <a:r>
+              <a:rPr lang="en-US" sz="2600" dirty="0" err="1">
+                <a:solidFill>
+                  <a:schemeClr val="dk1"/>
+                </a:solidFill>
+                <a:latin typeface="Calibri"/>
+                <a:ea typeface="Microsoft YaHei"/>
+              </a:rPr>
+              <a:t/>
+            </a:r>
+            <a:r>
+              <a:rPr lang="en-US" sz="2600" b="0" u="none" strike="noStrike" dirty="0">
+                <a:solidFill>
+                  <a:schemeClr val="dk1"/>
+                </a:solidFill>
+                <a:effectLst/>
+                <a:uFillTx/>
+                <a:latin typeface="Calibri"/>
+                <a:ea typeface="Microsoft YaHei"/>
+              </a:rPr>
+              <a:t/>
+            </a:r>
+          </a:p>
+          <a:p>
+            <a:pPr marL="540000" lvl="1" algn="l" defTabSz="457200">
+              <a:lnSpc>
+                <a:spcPct val="100000"/>
+              </a:lnSpc>
+              <a:spcBef>
+                <a:spcPts val="561"/>
+              </a:spcBef>
+              <a:buClr>
+                <a:srgbClr val="000000"/>
+              </a:buClr>
+              <a:buSzPct val="45000"/>
+              <a:tabLst>
+                <a:tab pos="0" algn="l"/>
+              </a:tabLst>
+            </a:pPr>
+            <a:endParaRPr lang="en-US" sz="1100" dirty="0">
+              <a:solidFill>
+                <a:schemeClr val="dk1"/>
+              </a:solidFill>
+              <a:latin typeface="Calibri"/>
+              <a:ea typeface="Microsoft YaHei"/>
+            </a:endParaRPr>
+          </a:p>
+          <a:p>
+            <a:pPr marL="540000" lvl="1" algn="l" defTabSz="457200">
+              <a:lnSpc>
+                <a:spcPct val="100000"/>
+              </a:lnSpc>
+              <a:spcBef>
+                <a:spcPts val="561"/>
+              </a:spcBef>
+              <a:buClr>
+                <a:srgbClr val="000000"/>
+              </a:buClr>
+              <a:buSzPct val="45000"/>
+              <a:tabLst>
+                <a:tab pos="0" algn="l"/>
+              </a:tabLst>
+            </a:pPr>
+            <a:r>
+              <a:rPr lang="en-US" sz="2600" b="1" dirty="0" err="1">
+                <a:solidFill>
+                  <a:schemeClr val="dk1"/>
+                </a:solidFill>
+                <a:latin typeface="Calibri"/>
+                <a:ea typeface="Microsoft YaHei"/>
+              </a:rPr>
+              <a:t>Porcentagem</a:t>
+            </a:r>
+            <a:r>
+              <a:rPr lang="en-US" sz="2600" b="1" dirty="0">
+                <a:solidFill>
+                  <a:schemeClr val="dk1"/>
+                </a:solidFill>
+                <a:latin typeface="Calibri"/>
+                <a:ea typeface="Microsoft YaHei"/>
+              </a:rPr>
+              <a:t> de </a:t>
+            </a:r>
+            <a:r>
+              <a:rPr lang="en-US" sz="2600" b="1" dirty="0" err="1">
+                <a:solidFill>
+                  <a:schemeClr val="dk1"/>
+                </a:solidFill>
+                <a:latin typeface="Calibri"/>
+                <a:ea typeface="Microsoft YaHei"/>
+              </a:rPr>
+              <a:t>cobertura</a:t>
+            </a:r>
+            <a:r>
+              <a:rPr lang="en-US" sz="2600" b="1" dirty="0">
+                <a:solidFill>
+                  <a:schemeClr val="dk1"/>
+                </a:solidFill>
+                <a:latin typeface="Calibri"/>
+                <a:ea typeface="Microsoft YaHei"/>
+              </a:rPr>
+              <a:t> </a:t>
+            </a:r>
+            <a:r>
+              <a:rPr lang="en-US" sz="2600" b="1" dirty="0" err="1">
+                <a:solidFill>
+                  <a:schemeClr val="dk1"/>
+                </a:solidFill>
+                <a:latin typeface="Calibri"/>
+                <a:ea typeface="Microsoft YaHei"/>
+              </a:rPr>
+              <a:t>por</a:t>
+            </a:r>
+            <a:r>
+              <a:rPr lang="en-US" sz="2600" b="1" dirty="0">
+                <a:solidFill>
+                  <a:schemeClr val="dk1"/>
+                </a:solidFill>
+                <a:latin typeface="Calibri"/>
+                <a:ea typeface="Microsoft YaHei"/>
+              </a:rPr>
+              <a:t> </a:t>
+            </a:r>
+            <a:r>
+              <a:rPr lang="en-US" sz="2600" b="1" dirty="0" err="1">
+                <a:solidFill>
+                  <a:schemeClr val="dk1"/>
+                </a:solidFill>
+                <a:latin typeface="Calibri"/>
+                <a:ea typeface="Microsoft YaHei"/>
+              </a:rPr>
+              <a:t>requisito</a:t>
+            </a:r>
+            <a:r>
+              <a:rPr lang="en-US" sz="2600" dirty="0">
+                <a:solidFill>
+                  <a:schemeClr val="dk1"/>
+                </a:solidFill>
+                <a:latin typeface="Calibri"/>
+                <a:ea typeface="Microsoft YaHei"/>
+              </a:rPr>
+              <a:t>:</a:t>
+            </a:r>
+            <a:endParaRPr lang="en-US" sz="2600" b="0" u="none" strike="noStrike" dirty="0">
+              <a:solidFill>
+                <a:schemeClr val="dk1"/>
+              </a:solidFill>
+              <a:effectLst/>
+              <a:uFillTx/>
+              <a:latin typeface="Calibri"/>
+            </a:endParaRPr>
+          </a:p>
+          <a:p>
+            <a:pPr marL="864000" lvl="1" indent="-324000" algn="l" defTabSz="457200">
+              <a:lnSpc>
+                <a:spcPct val="100000"/>
+              </a:lnSpc>
+              <a:spcBef>
+                <a:spcPts val="561"/>
+              </a:spcBef>
+              <a:buClr>
+                <a:srgbClr val="000000"/>
+              </a:buClr>
+              <a:buSzPct val="45000"/>
+              <a:buFont typeface="Wingdings" charset="2"/>
+              <a:buChar char=""/>
+              <a:tabLst>
+                <a:tab pos="0" algn="l"/>
+              </a:tabLst>
+            </a:pPr>
+            <a:r>
+              <a:rPr lang="en-US" sz="2600" b="0" u="none" strike="noStrike" dirty="0">
+                <a:solidFill>
+                  <a:schemeClr val="dk1"/>
+                </a:solidFill>
+                <a:effectLst/>
+                <a:uFillTx/>
+                <a:latin typeface="Calibri"/>
+                <a:ea typeface="Microsoft YaHei"/>
+              </a:rPr>
+              <a:t>REQ-008: antes ~20%, depois ~22%, delta +2</a:t>
+            </a:r>
+            <a:r>
+              <a:rPr lang="en-US" sz="2600" b="0" u="none" strike="noStrike" dirty="0" err="1">
+                <a:solidFill>
+                  <a:schemeClr val="dk1"/>
+                </a:solidFill>
+                <a:effectLst/>
+                <a:uFillTx/>
+                <a:latin typeface="Calibri"/>
+                <a:ea typeface="Microsoft YaHei"/>
+              </a:rPr>
+              <a:t/>
+            </a:r>
+            <a:r>
+              <a:rPr lang="en-US" sz="2600" dirty="0" err="1">
+                <a:solidFill>
+                  <a:schemeClr val="dk1"/>
+                </a:solidFill>
+                <a:latin typeface="Calibri"/>
+                <a:ea typeface="Microsoft YaHei"/>
+              </a:rPr>
+              <a:t/>
+            </a:r>
+            <a:r>
+              <a:rPr lang="en-US" sz="2600" b="0" u="none" strike="noStrike" dirty="0" err="1">
+                <a:solidFill>
+                  <a:schemeClr val="dk1"/>
+                </a:solidFill>
+                <a:effectLst/>
+                <a:uFillTx/>
+                <a:latin typeface="Calibri"/>
+                <a:ea typeface="Microsoft YaHei"/>
+              </a:rPr>
+              <a:t/>
+            </a:r>
+            <a:r>
+              <a:rPr lang="en-US" sz="2600" b="0" u="none" strike="noStrike" dirty="0">
+                <a:solidFill>
+                  <a:schemeClr val="dk1"/>
+                </a:solidFill>
+                <a:effectLst/>
+                <a:uFillTx/>
+                <a:latin typeface="Calibri"/>
+                <a:ea typeface="Microsoft YaHei"/>
+              </a:rPr>
+              <a:t/>
+            </a:r>
+            <a:endParaRPr lang="en-US" sz="2600" b="0" u="none" strike="noStrike" dirty="0">
+              <a:solidFill>
+                <a:schemeClr val="dk1"/>
+              </a:solidFill>
+              <a:effectLst/>
+              <a:uFillTx/>
+              <a:latin typeface="Calibri"/>
+            </a:endParaRPr>
+          </a:p>
+        </p:txBody>
+      </p:sp>
+      <p:pic>
+        <p:nvPicPr>
+          <p:cNvPr id="72" name="Imagem 71"/>
+          <p:cNvPicPr/>
+          <p:nvPr/>
+        </p:nvPicPr>
+        <p:blipFill>
+          <a:blip r:embed="rId2"/>
+          <a:stretch/>
+        </p:blipFill>
+        <p:spPr>
+          <a:xfrm>
+            <a:off x="720" y="-28800"/>
+            <a:ext cx="9142560" cy="1647720"/>
+          </a:xfrm>
+          <a:prstGeom prst="rect">
+            <a:avLst/>
+          </a:prstGeom>
+          <a:noFill/>
+          <a:ln w="0">
+            <a:noFill/>
+          </a:ln>
+        </p:spPr>
+      </p:pic>
+      <p:sp>
+        <p:nvSpPr>
+          <p:cNvPr id="73" name="Title 3"/>
+          <p:cNvSpPr/>
+          <p:nvPr/>
+        </p:nvSpPr>
+        <p:spPr>
+          <a:xfrm>
+            <a:off x="915480" y="180000"/>
+            <a:ext cx="8228160" cy="1141560"/>
+          </a:xfrm>
+          <a:prstGeom prst="rect">
+            <a:avLst/>
+          </a:prstGeom>
+          <a:noFill/>
+          <a:ln w="0">
+            <a:noFill/>
+          </a:ln>
+        </p:spPr>
+        <p:style>
+          <a:lnRef idx="0">
+            <a:scrgbClr r="0" g="0" b="0"/>
+          </a:lnRef>
+          <a:fillRef idx="0">
+            <a:scrgbClr r="0" g="0" b="0"/>
+          </a:fillRef>
+          <a:effectRef idx="0">
+            <a:scrgbClr r="0" g="0" b="0"/>
+          </a:effectRef>
+          <a:fontRef idx="minor"/>
+        </p:style>
+        <p:txBody>
+          <a:bodyPr lIns="90000" tIns="45000" rIns="90000" bIns="45000" anchor="ctr">
+            <a:noAutofit/>
+          </a:bodyPr>
+          <a:lstStyle/>
+          <a:p>
+            <a:pPr algn="ctr" defTabSz="457200">
+              <a:lnSpc>
+                <a:spcPct val="100000"/>
+              </a:lnSpc>
+            </a:pPr>
+            <a:r>
+              <a:rPr lang="en-US" sz="4400" b="0" u="none" strike="noStrike">
+                <a:solidFill>
+                  <a:srgbClr val="EA7500"/>
+                </a:solidFill>
+                <a:effectLst/>
+                <a:uFillTx/>
+                <a:latin typeface="Calibri"/>
+              </a:rPr>
+              <a:t>Realizações da Sprint</a:t>
+            </a:r>
+            <a:endParaRPr lang="pt-BR" sz="4400" b="0" u="none" strike="noStrike">
+              <a:solidFill>
+                <a:srgbClr val="000000"/>
+              </a:solidFill>
+              <a:effectLst/>
+              <a:uFillTx/>
+              <a:latin typeface="Arial"/>
+            </a:endParaRPr>
+          </a:p>
+        </p:txBody>
+      </p:sp>
+    </p:spTree>
+  </p:cSld>
+  <p:clrMapOvr>
+    <a:masterClrMapping/>
+  </p:clrMapOvr>
+</p:sld>
+</file>
+
+<file path=ppt/slides/slide41.xml><?xml version="1.0" encoding="utf-8"?>
+<p:sld xmlns:a="http://schemas.openxmlformats.org/drawingml/2006/main" xmlns:p="http://schemas.openxmlformats.org/presentationml/2006/main" xmlns:r="http://schemas.openxmlformats.org/officeDocument/2006/relationships">
+  <p:cSld>
+    <p:spTree>
+      <p:nvGrpSpPr>
+        <p:cNvPr id="1" name=""/>
+        <p:cNvGrpSpPr/>
+        <p:nvPr/>
+      </p:nvGrpSpPr>
+      <p:grpSpPr/>
+      <p:sp>
+        <p:nvSpPr>
+          <p:cNvPr id="71" name="PlaceHolder 1"/>
+          <p:cNvSpPr>
+            <a:spLocks noGrp="1"/>
+          </p:cNvSpPr>
+          <p:nvPr>
+            <p:ph/>
+          </p:nvPr>
+        </p:nvSpPr>
+        <p:spPr>
+          <a:xfrm>
+            <a:off x="411120" y="1321560"/>
+            <a:ext cx="8228160" cy="4637520"/>
+          </a:xfrm>
+          <a:prstGeom prst="rect">
+            <a:avLst/>
+          </a:prstGeom>
+          <a:noFill/>
+          <a:ln w="0">
+            <a:noFill/>
+          </a:ln>
+        </p:spPr>
+        <p:txBody>
+          <a:bodyPr lIns="91440" tIns="45720" rIns="91440" bIns="45720" anchor="t">
+            <a:noAutofit/>
+          </a:bodyPr>
+          <a:lstStyle/>
+          <a:p>
+            <a:pPr indent="0" algn="l" defTabSz="457200">
+              <a:lnSpc>
+                <a:spcPct val="100000"/>
+              </a:lnSpc>
+              <a:spcBef>
+                <a:spcPts val="641"/>
+              </a:spcBef>
+              <a:buNone/>
+              <a:tabLst>
+                <a:tab pos="0" algn="l"/>
+              </a:tabLst>
+            </a:pPr>
+            <a:endParaRPr lang="en-US" sz="3200" b="0" u="none" strike="noStrike" dirty="0">
+              <a:solidFill>
+                <a:schemeClr val="dk1"/>
+              </a:solidFill>
+              <a:effectLst/>
+              <a:uFillTx/>
+              <a:latin typeface="Calibri"/>
+            </a:endParaRPr>
+          </a:p>
+          <a:p>
+            <a:pPr marL="343080" indent="0" algn="l" defTabSz="457200">
+              <a:lnSpc>
+                <a:spcPct val="100000"/>
+              </a:lnSpc>
+              <a:spcBef>
+                <a:spcPts val="641"/>
+              </a:spcBef>
+              <a:buNone/>
+              <a:tabLst>
+                <a:tab pos="0" algn="l"/>
+              </a:tabLst>
+            </a:pPr>
+            <a:r>
+              <a:rPr lang="en-US" sz="3200" b="0" u="none" strike="noStrike" dirty="0">
+                <a:solidFill>
+                  <a:schemeClr val="dk1"/>
+                </a:solidFill>
+                <a:effectLst/>
+                <a:uFillTx/>
+                <a:latin typeface="Calibri"/>
+              </a:rPr>
+              <a:t/>
+            </a:r>
+            <a:r>
+              <a:rPr lang="en-US" sz="3200" b="0" u="none" strike="noStrike" dirty="0" err="1">
+                <a:solidFill>
+                  <a:schemeClr val="dk1"/>
+                </a:solidFill>
+                <a:effectLst/>
+                <a:uFillTx/>
+                <a:latin typeface="Calibri"/>
+              </a:rPr>
+              <a:t/>
+            </a:r>
+            <a:r>
+              <a:rPr lang="en-US" sz="3200" b="0" u="none" strike="noStrike" dirty="0">
+                <a:solidFill>
+                  <a:schemeClr val="dk1"/>
+                </a:solidFill>
+                <a:effectLst/>
+                <a:uFillTx/>
+                <a:latin typeface="Calibri"/>
+              </a:rPr>
+              <a:t/>
+            </a:r>
+          </a:p>
+          <a:p>
+            <a:pPr marL="343080" indent="-343080" algn="l" defTabSz="457200">
+              <a:lnSpc>
+                <a:spcPct val="100000"/>
+              </a:lnSpc>
+              <a:spcBef>
+                <a:spcPts val="641"/>
+              </a:spcBef>
+              <a:buClr>
+                <a:srgbClr val="000000"/>
+              </a:buClr>
+              <a:buSzPct val="45000"/>
+              <a:buFont typeface="Wingdings" charset="2"/>
+              <a:buChar char=""/>
+              <a:tabLst>
+                <a:tab pos="0" algn="l"/>
+              </a:tabLst>
+            </a:pPr>
+            <a:r>
+              <a:rPr lang="en-US" sz="2600" b="1" u="none" strike="noStrike" dirty="0">
+                <a:solidFill>
+                  <a:schemeClr val="tx2"/>
+                </a:solidFill>
+                <a:effectLst/>
+                <a:uFillTx/>
+                <a:latin typeface="Calibri"/>
+              </a:rPr>
+              <a:t>Processo gerente — Bootstrap GitHub Projects + automação de criação de issues (bugs CTF e backlog REQ-002)</a:t>
+            </a:r>
+            <a:r>
+              <a:rPr lang="en-US" sz="2600" b="1" u="none" strike="noStrike" dirty="0" err="1">
+                <a:solidFill>
+                  <a:schemeClr val="tx2"/>
+                </a:solidFill>
+                <a:effectLst/>
+                <a:uFillTx/>
+                <a:latin typeface="Calibri"/>
+              </a:rPr>
+              <a:t/>
+            </a:r>
+            <a:r>
+              <a:rPr lang="en-US" sz="2600" b="1" u="none" strike="noStrike" dirty="0">
+                <a:solidFill>
+                  <a:schemeClr val="tx2"/>
+                </a:solidFill>
+                <a:effectLst/>
+                <a:uFillTx/>
+                <a:latin typeface="Calibri"/>
+              </a:rPr>
+              <a:t/>
+            </a:r>
+          </a:p>
+          <a:p>
+            <a:pPr marL="540000" lvl="1" algn="l" defTabSz="457200">
+              <a:lnSpc>
+                <a:spcPct val="100000"/>
+              </a:lnSpc>
+              <a:spcBef>
+                <a:spcPts val="561"/>
+              </a:spcBef>
+              <a:buClr>
+                <a:srgbClr val="000000"/>
+              </a:buClr>
+              <a:buSzPct val="45000"/>
+              <a:tabLst>
+                <a:tab pos="0" algn="l"/>
+              </a:tabLst>
+            </a:pPr>
+            <a:r>
+              <a:rPr lang="en-US" sz="2600" b="1" u="none" strike="noStrike" dirty="0" err="1">
+                <a:solidFill>
+                  <a:schemeClr val="dk1"/>
+                </a:solidFill>
+                <a:effectLst/>
+                <a:uFillTx/>
+                <a:latin typeface="Calibri"/>
+                <a:ea typeface="Microsoft YaHei"/>
+              </a:rPr>
+              <a:t>Requisitos</a:t>
+            </a:r>
+            <a:r>
+              <a:rPr lang="en-US" sz="2600" b="1" u="none" strike="noStrike" dirty="0">
+                <a:solidFill>
+                  <a:schemeClr val="dk1"/>
+                </a:solidFill>
+                <a:effectLst/>
+                <a:uFillTx/>
+                <a:latin typeface="Calibri"/>
+                <a:ea typeface="Microsoft YaHei"/>
+              </a:rPr>
+              <a:t> </a:t>
+            </a:r>
+            <a:r>
+              <a:rPr lang="en-US" sz="2600" b="1" u="none" strike="noStrike" dirty="0" err="1">
+                <a:solidFill>
+                  <a:schemeClr val="dk1"/>
+                </a:solidFill>
+                <a:effectLst/>
+                <a:uFillTx/>
+                <a:latin typeface="Calibri"/>
+                <a:ea typeface="Microsoft YaHei"/>
+              </a:rPr>
+              <a:t>envolvidos</a:t>
+            </a:r>
+            <a:r>
+              <a:rPr lang="en-US" sz="2600" b="0" u="none" strike="noStrike" dirty="0">
+                <a:solidFill>
+                  <a:schemeClr val="dk1"/>
+                </a:solidFill>
+                <a:effectLst/>
+                <a:uFillTx/>
+                <a:latin typeface="Calibri"/>
+                <a:ea typeface="Microsoft YaHei"/>
+              </a:rPr>
+              <a:t>: -</a:t>
+            </a:r>
+            <a:r>
+              <a:rPr lang="en-US" sz="2600" b="0" u="none" strike="noStrike" dirty="0" err="1">
+                <a:solidFill>
+                  <a:schemeClr val="dk1"/>
+                </a:solidFill>
+                <a:effectLst/>
+                <a:uFillTx/>
+                <a:latin typeface="Calibri"/>
+                <a:ea typeface="Microsoft YaHei"/>
+              </a:rPr>
+              <a:t/>
+            </a:r>
+            <a:r>
+              <a:rPr lang="en-US" sz="2600" dirty="0" err="1">
+                <a:solidFill>
+                  <a:schemeClr val="dk1"/>
+                </a:solidFill>
+                <a:latin typeface="Calibri"/>
+                <a:ea typeface="Microsoft YaHei"/>
+              </a:rPr>
+              <a:t/>
+            </a:r>
+            <a:r>
+              <a:rPr lang="en-US" sz="2600" b="0" u="none" strike="noStrike" dirty="0">
+                <a:solidFill>
+                  <a:schemeClr val="dk1"/>
+                </a:solidFill>
+                <a:effectLst/>
+                <a:uFillTx/>
+                <a:latin typeface="Calibri"/>
+                <a:ea typeface="Microsoft YaHei"/>
+              </a:rPr>
+              <a:t/>
+            </a:r>
+          </a:p>
+          <a:p>
+            <a:pPr marL="540000" lvl="1" algn="l" defTabSz="457200">
+              <a:lnSpc>
+                <a:spcPct val="100000"/>
+              </a:lnSpc>
+              <a:spcBef>
+                <a:spcPts val="561"/>
+              </a:spcBef>
+              <a:buClr>
+                <a:srgbClr val="000000"/>
+              </a:buClr>
+              <a:buSzPct val="45000"/>
+              <a:tabLst>
+                <a:tab pos="0" algn="l"/>
+              </a:tabLst>
+            </a:pPr>
+            <a:endParaRPr lang="en-US" sz="1100" dirty="0">
+              <a:solidFill>
+                <a:schemeClr val="dk1"/>
+              </a:solidFill>
+              <a:latin typeface="Calibri"/>
+              <a:ea typeface="Microsoft YaHei"/>
+            </a:endParaRPr>
+          </a:p>
+          <a:p>
+            <a:pPr marL="540000" lvl="1" algn="l" defTabSz="457200">
+              <a:lnSpc>
+                <a:spcPct val="100000"/>
+              </a:lnSpc>
+              <a:spcBef>
+                <a:spcPts val="561"/>
+              </a:spcBef>
+              <a:buClr>
+                <a:srgbClr val="000000"/>
+              </a:buClr>
+              <a:buSzPct val="45000"/>
+              <a:tabLst>
+                <a:tab pos="0" algn="l"/>
+              </a:tabLst>
+            </a:pPr>
+            <a:r>
+              <a:rPr lang="en-US" sz="2600" b="1" dirty="0" err="1">
+                <a:solidFill>
+                  <a:schemeClr val="dk1"/>
+                </a:solidFill>
+                <a:latin typeface="Calibri"/>
+                <a:ea typeface="Microsoft YaHei"/>
+              </a:rPr>
+              <a:t>Porcentagem</a:t>
+            </a:r>
+            <a:r>
+              <a:rPr lang="en-US" sz="2600" b="1" dirty="0">
+                <a:solidFill>
+                  <a:schemeClr val="dk1"/>
+                </a:solidFill>
+                <a:latin typeface="Calibri"/>
+                <a:ea typeface="Microsoft YaHei"/>
+              </a:rPr>
+              <a:t> de </a:t>
+            </a:r>
+            <a:r>
+              <a:rPr lang="en-US" sz="2600" b="1" dirty="0" err="1">
+                <a:solidFill>
+                  <a:schemeClr val="dk1"/>
+                </a:solidFill>
+                <a:latin typeface="Calibri"/>
+                <a:ea typeface="Microsoft YaHei"/>
+              </a:rPr>
+              <a:t>cobertura</a:t>
+            </a:r>
+            <a:r>
+              <a:rPr lang="en-US" sz="2600" b="1" dirty="0">
+                <a:solidFill>
+                  <a:schemeClr val="dk1"/>
+                </a:solidFill>
+                <a:latin typeface="Calibri"/>
+                <a:ea typeface="Microsoft YaHei"/>
+              </a:rPr>
+              <a:t> </a:t>
+            </a:r>
+            <a:r>
+              <a:rPr lang="en-US" sz="2600" b="1" dirty="0" err="1">
+                <a:solidFill>
+                  <a:schemeClr val="dk1"/>
+                </a:solidFill>
+                <a:latin typeface="Calibri"/>
+                <a:ea typeface="Microsoft YaHei"/>
+              </a:rPr>
+              <a:t>por</a:t>
+            </a:r>
+            <a:r>
+              <a:rPr lang="en-US" sz="2600" b="1" dirty="0">
+                <a:solidFill>
+                  <a:schemeClr val="dk1"/>
+                </a:solidFill>
+                <a:latin typeface="Calibri"/>
+                <a:ea typeface="Microsoft YaHei"/>
+              </a:rPr>
+              <a:t> </a:t>
+            </a:r>
+            <a:r>
+              <a:rPr lang="en-US" sz="2600" b="1" dirty="0" err="1">
+                <a:solidFill>
+                  <a:schemeClr val="dk1"/>
+                </a:solidFill>
+                <a:latin typeface="Calibri"/>
+                <a:ea typeface="Microsoft YaHei"/>
+              </a:rPr>
+              <a:t>requisito</a:t>
+            </a:r>
+            <a:r>
+              <a:rPr lang="en-US" sz="2600" dirty="0">
+                <a:solidFill>
+                  <a:schemeClr val="dk1"/>
+                </a:solidFill>
+                <a:latin typeface="Calibri"/>
+                <a:ea typeface="Microsoft YaHei"/>
+              </a:rPr>
+              <a:t>:</a:t>
+            </a:r>
+            <a:endParaRPr lang="en-US" sz="2600" b="0" u="none" strike="noStrike" dirty="0">
+              <a:solidFill>
+                <a:schemeClr val="dk1"/>
+              </a:solidFill>
+              <a:effectLst/>
+              <a:uFillTx/>
+              <a:latin typeface="Calibri"/>
+            </a:endParaRPr>
+          </a:p>
+          <a:p>
+            <a:pPr marL="864000" lvl="1" indent="-324000" algn="l" defTabSz="457200">
+              <a:lnSpc>
+                <a:spcPct val="100000"/>
+              </a:lnSpc>
+              <a:spcBef>
+                <a:spcPts val="561"/>
+              </a:spcBef>
+              <a:buClr>
+                <a:srgbClr val="000000"/>
+              </a:buClr>
+              <a:buSzPct val="45000"/>
+              <a:buFont typeface="Wingdings" charset="2"/>
+              <a:buChar char=""/>
+              <a:tabLst>
+                <a:tab pos="0" algn="l"/>
+              </a:tabLst>
+            </a:pPr>
+            <a:r>
+              <a:rPr lang="en-US" sz="2600" b="0" u="none" strike="noStrike" dirty="0">
+                <a:solidFill>
+                  <a:schemeClr val="dk1"/>
+                </a:solidFill>
+                <a:effectLst/>
+                <a:uFillTx/>
+                <a:latin typeface="Calibri"/>
+                <a:ea typeface="Microsoft YaHei"/>
+              </a:rPr>
+              <a:t>obs: governanca; scripts/bootstrap_github_projects.ps1 + criar_issues_req002.ps1 + criar_issues_req016_sprint03.ps1</a:t>
+            </a:r>
+            <a:r>
+              <a:rPr lang="en-US" sz="2600" b="0" u="none" strike="noStrike" dirty="0" err="1">
+                <a:solidFill>
+                  <a:schemeClr val="dk1"/>
+                </a:solidFill>
+                <a:effectLst/>
+                <a:uFillTx/>
+                <a:latin typeface="Calibri"/>
+                <a:ea typeface="Microsoft YaHei"/>
+              </a:rPr>
+              <a:t/>
+            </a:r>
+            <a:r>
+              <a:rPr lang="en-US" sz="2600" dirty="0" err="1">
+                <a:solidFill>
+                  <a:schemeClr val="dk1"/>
+                </a:solidFill>
+                <a:latin typeface="Calibri"/>
+                <a:ea typeface="Microsoft YaHei"/>
+              </a:rPr>
+              <a:t/>
+            </a:r>
+            <a:r>
+              <a:rPr lang="en-US" sz="2600" b="0" u="none" strike="noStrike" dirty="0" err="1">
+                <a:solidFill>
+                  <a:schemeClr val="dk1"/>
+                </a:solidFill>
+                <a:effectLst/>
+                <a:uFillTx/>
+                <a:latin typeface="Calibri"/>
+                <a:ea typeface="Microsoft YaHei"/>
+              </a:rPr>
+              <a:t/>
+            </a:r>
+            <a:r>
+              <a:rPr lang="en-US" sz="2600" b="0" u="none" strike="noStrike" dirty="0">
+                <a:solidFill>
+                  <a:schemeClr val="dk1"/>
+                </a:solidFill>
+                <a:effectLst/>
+                <a:uFillTx/>
+                <a:latin typeface="Calibri"/>
+                <a:ea typeface="Microsoft YaHei"/>
+              </a:rPr>
+              <a:t/>
+            </a:r>
+            <a:endParaRPr lang="en-US" sz="2600" b="0" u="none" strike="noStrike" dirty="0">
+              <a:solidFill>
+                <a:schemeClr val="dk1"/>
+              </a:solidFill>
+              <a:effectLst/>
+              <a:uFillTx/>
+              <a:latin typeface="Calibri"/>
+            </a:endParaRPr>
+          </a:p>
+        </p:txBody>
+      </p:sp>
+      <p:pic>
+        <p:nvPicPr>
+          <p:cNvPr id="72" name="Imagem 71"/>
+          <p:cNvPicPr/>
+          <p:nvPr/>
+        </p:nvPicPr>
+        <p:blipFill>
+          <a:blip r:embed="rId2"/>
+          <a:stretch/>
+        </p:blipFill>
+        <p:spPr>
+          <a:xfrm>
+            <a:off x="720" y="-28800"/>
+            <a:ext cx="9142560" cy="1647720"/>
+          </a:xfrm>
+          <a:prstGeom prst="rect">
+            <a:avLst/>
+          </a:prstGeom>
+          <a:noFill/>
+          <a:ln w="0">
+            <a:noFill/>
+          </a:ln>
+        </p:spPr>
+      </p:pic>
+      <p:sp>
+        <p:nvSpPr>
+          <p:cNvPr id="73" name="Title 3"/>
+          <p:cNvSpPr/>
+          <p:nvPr/>
+        </p:nvSpPr>
+        <p:spPr>
+          <a:xfrm>
+            <a:off x="915480" y="180000"/>
+            <a:ext cx="8228160" cy="1141560"/>
+          </a:xfrm>
+          <a:prstGeom prst="rect">
+            <a:avLst/>
+          </a:prstGeom>
+          <a:noFill/>
+          <a:ln w="0">
+            <a:noFill/>
+          </a:ln>
+        </p:spPr>
+        <p:style>
+          <a:lnRef idx="0">
+            <a:scrgbClr r="0" g="0" b="0"/>
+          </a:lnRef>
+          <a:fillRef idx="0">
+            <a:scrgbClr r="0" g="0" b="0"/>
+          </a:fillRef>
+          <a:effectRef idx="0">
+            <a:scrgbClr r="0" g="0" b="0"/>
+          </a:effectRef>
+          <a:fontRef idx="minor"/>
+        </p:style>
+        <p:txBody>
+          <a:bodyPr lIns="90000" tIns="45000" rIns="90000" bIns="45000" anchor="ctr">
+            <a:noAutofit/>
+          </a:bodyPr>
+          <a:lstStyle/>
+          <a:p>
+            <a:pPr algn="ctr" defTabSz="457200">
+              <a:lnSpc>
+                <a:spcPct val="100000"/>
+              </a:lnSpc>
+            </a:pPr>
+            <a:r>
+              <a:rPr lang="en-US" sz="4400" b="0" u="none" strike="noStrike">
+                <a:solidFill>
+                  <a:srgbClr val="EA7500"/>
+                </a:solidFill>
+                <a:effectLst/>
+                <a:uFillTx/>
+                <a:latin typeface="Calibri"/>
+              </a:rPr>
+              <a:t>Realizações da Sprint</a:t>
+            </a:r>
+            <a:endParaRPr lang="pt-BR" sz="4400" b="0" u="none" strike="noStrike">
+              <a:solidFill>
+                <a:srgbClr val="000000"/>
+              </a:solidFill>
+              <a:effectLst/>
+              <a:uFillTx/>
+              <a:latin typeface="Arial"/>
+            </a:endParaRPr>
+          </a:p>
+        </p:txBody>
+      </p:sp>
+    </p:spTree>
+  </p:cSld>
+  <p:clrMapOvr>
+    <a:masterClrMapping/>
+  </p:clrMapOvr>
+</p:sld>
+</file>
+
+<file path=ppt/slides/slide42.xml><?xml version="1.0" encoding="utf-8"?>
+<p:sld xmlns:a="http://schemas.openxmlformats.org/drawingml/2006/main" xmlns:p="http://schemas.openxmlformats.org/presentationml/2006/main" xmlns:r="http://schemas.openxmlformats.org/officeDocument/2006/relationships">
+  <p:cSld>
+    <p:spTree>
+      <p:nvGrpSpPr>
+        <p:cNvPr id="1" name=""/>
+        <p:cNvGrpSpPr/>
+        <p:nvPr/>
+      </p:nvGrpSpPr>
+      <p:grpSpPr/>
+      <p:sp>
+        <p:nvSpPr>
+          <p:cNvPr id="71" name="PlaceHolder 1"/>
+          <p:cNvSpPr>
+            <a:spLocks noGrp="1"/>
+          </p:cNvSpPr>
+          <p:nvPr>
+            <p:ph/>
+          </p:nvPr>
+        </p:nvSpPr>
+        <p:spPr>
+          <a:xfrm>
+            <a:off x="411120" y="1321560"/>
+            <a:ext cx="8228160" cy="4637520"/>
+          </a:xfrm>
+          <a:prstGeom prst="rect">
+            <a:avLst/>
+          </a:prstGeom>
+          <a:noFill/>
+          <a:ln w="0">
+            <a:noFill/>
+          </a:ln>
+        </p:spPr>
+        <p:txBody>
+          <a:bodyPr lIns="91440" tIns="45720" rIns="91440" bIns="45720" anchor="t">
+            <a:noAutofit/>
+          </a:bodyPr>
+          <a:lstStyle/>
+          <a:p>
+            <a:pPr indent="0" algn="l" defTabSz="457200">
+              <a:lnSpc>
+                <a:spcPct val="100000"/>
+              </a:lnSpc>
+              <a:spcBef>
+                <a:spcPts val="641"/>
+              </a:spcBef>
+              <a:buNone/>
+              <a:tabLst>
+                <a:tab pos="0" algn="l"/>
+              </a:tabLst>
+            </a:pPr>
+            <a:endParaRPr lang="en-US" sz="3200" b="0" u="none" strike="noStrike" dirty="0">
+              <a:solidFill>
+                <a:schemeClr val="dk1"/>
+              </a:solidFill>
+              <a:effectLst/>
+              <a:uFillTx/>
+              <a:latin typeface="Calibri"/>
+            </a:endParaRPr>
+          </a:p>
+          <a:p>
+            <a:pPr marL="343080" indent="0" algn="l" defTabSz="457200">
+              <a:lnSpc>
+                <a:spcPct val="100000"/>
+              </a:lnSpc>
+              <a:spcBef>
+                <a:spcPts val="641"/>
+              </a:spcBef>
+              <a:buNone/>
+              <a:tabLst>
+                <a:tab pos="0" algn="l"/>
+              </a:tabLst>
+            </a:pPr>
+            <a:r>
+              <a:rPr lang="en-US" sz="3200" b="0" u="none" strike="noStrike" dirty="0">
+                <a:solidFill>
+                  <a:schemeClr val="dk1"/>
+                </a:solidFill>
+                <a:effectLst/>
+                <a:uFillTx/>
+                <a:latin typeface="Calibri"/>
+              </a:rPr>
+              <a:t/>
+            </a:r>
+            <a:r>
+              <a:rPr lang="en-US" sz="3200" b="0" u="none" strike="noStrike" dirty="0" err="1">
+                <a:solidFill>
+                  <a:schemeClr val="dk1"/>
+                </a:solidFill>
+                <a:effectLst/>
+                <a:uFillTx/>
+                <a:latin typeface="Calibri"/>
+              </a:rPr>
+              <a:t/>
+            </a:r>
+            <a:r>
+              <a:rPr lang="en-US" sz="3200" b="0" u="none" strike="noStrike" dirty="0">
+                <a:solidFill>
+                  <a:schemeClr val="dk1"/>
+                </a:solidFill>
+                <a:effectLst/>
+                <a:uFillTx/>
+                <a:latin typeface="Calibri"/>
+              </a:rPr>
+              <a:t/>
+            </a:r>
+          </a:p>
+          <a:p>
+            <a:pPr marL="343080" indent="-343080" algn="l" defTabSz="457200">
+              <a:lnSpc>
+                <a:spcPct val="100000"/>
+              </a:lnSpc>
+              <a:spcBef>
+                <a:spcPts val="641"/>
+              </a:spcBef>
+              <a:buClr>
+                <a:srgbClr val="000000"/>
+              </a:buClr>
+              <a:buSzPct val="45000"/>
+              <a:buFont typeface="Wingdings" charset="2"/>
+              <a:buChar char=""/>
+              <a:tabLst>
+                <a:tab pos="0" algn="l"/>
+              </a:tabLst>
+            </a:pPr>
+            <a:r>
+              <a:rPr lang="en-US" sz="2600" b="1" u="none" strike="noStrike" dirty="0">
+                <a:solidFill>
+                  <a:schemeClr val="tx2"/>
+                </a:solidFill>
+                <a:effectLst/>
+                <a:uFillTx/>
+                <a:latin typeface="Calibri"/>
+              </a:rPr>
+              <a:t>Qualidade — Lint Ruff aplicado em todo o backend (correções incrementais)</a:t>
+            </a:r>
+            <a:r>
+              <a:rPr lang="en-US" sz="2600" b="1" u="none" strike="noStrike" dirty="0" err="1">
+                <a:solidFill>
+                  <a:schemeClr val="tx2"/>
+                </a:solidFill>
+                <a:effectLst/>
+                <a:uFillTx/>
+                <a:latin typeface="Calibri"/>
+              </a:rPr>
+              <a:t/>
+            </a:r>
+            <a:r>
+              <a:rPr lang="en-US" sz="2600" b="1" u="none" strike="noStrike" dirty="0">
+                <a:solidFill>
+                  <a:schemeClr val="tx2"/>
+                </a:solidFill>
+                <a:effectLst/>
+                <a:uFillTx/>
+                <a:latin typeface="Calibri"/>
+              </a:rPr>
+              <a:t/>
+            </a:r>
+          </a:p>
+          <a:p>
+            <a:pPr marL="540000" lvl="1" algn="l" defTabSz="457200">
+              <a:lnSpc>
+                <a:spcPct val="100000"/>
+              </a:lnSpc>
+              <a:spcBef>
+                <a:spcPts val="561"/>
+              </a:spcBef>
+              <a:buClr>
+                <a:srgbClr val="000000"/>
+              </a:buClr>
+              <a:buSzPct val="45000"/>
+              <a:tabLst>
+                <a:tab pos="0" algn="l"/>
+              </a:tabLst>
+            </a:pPr>
+            <a:r>
+              <a:rPr lang="en-US" sz="2600" b="1" u="none" strike="noStrike" dirty="0" err="1">
+                <a:solidFill>
+                  <a:schemeClr val="dk1"/>
+                </a:solidFill>
+                <a:effectLst/>
+                <a:uFillTx/>
+                <a:latin typeface="Calibri"/>
+                <a:ea typeface="Microsoft YaHei"/>
+              </a:rPr>
+              <a:t>Requisitos</a:t>
+            </a:r>
+            <a:r>
+              <a:rPr lang="en-US" sz="2600" b="1" u="none" strike="noStrike" dirty="0">
+                <a:solidFill>
+                  <a:schemeClr val="dk1"/>
+                </a:solidFill>
+                <a:effectLst/>
+                <a:uFillTx/>
+                <a:latin typeface="Calibri"/>
+                <a:ea typeface="Microsoft YaHei"/>
+              </a:rPr>
+              <a:t> </a:t>
+            </a:r>
+            <a:r>
+              <a:rPr lang="en-US" sz="2600" b="1" u="none" strike="noStrike" dirty="0" err="1">
+                <a:solidFill>
+                  <a:schemeClr val="dk1"/>
+                </a:solidFill>
+                <a:effectLst/>
+                <a:uFillTx/>
+                <a:latin typeface="Calibri"/>
+                <a:ea typeface="Microsoft YaHei"/>
+              </a:rPr>
+              <a:t>envolvidos</a:t>
+            </a:r>
+            <a:r>
+              <a:rPr lang="en-US" sz="2600" b="0" u="none" strike="noStrike" dirty="0">
+                <a:solidFill>
+                  <a:schemeClr val="dk1"/>
+                </a:solidFill>
+                <a:effectLst/>
+                <a:uFillTx/>
+                <a:latin typeface="Calibri"/>
+                <a:ea typeface="Microsoft YaHei"/>
+              </a:rPr>
+              <a:t>: -</a:t>
+            </a:r>
+            <a:r>
+              <a:rPr lang="en-US" sz="2600" b="0" u="none" strike="noStrike" dirty="0" err="1">
+                <a:solidFill>
+                  <a:schemeClr val="dk1"/>
+                </a:solidFill>
+                <a:effectLst/>
+                <a:uFillTx/>
+                <a:latin typeface="Calibri"/>
+                <a:ea typeface="Microsoft YaHei"/>
+              </a:rPr>
+              <a:t/>
+            </a:r>
+            <a:r>
+              <a:rPr lang="en-US" sz="2600" dirty="0" err="1">
+                <a:solidFill>
+                  <a:schemeClr val="dk1"/>
+                </a:solidFill>
+                <a:latin typeface="Calibri"/>
+                <a:ea typeface="Microsoft YaHei"/>
+              </a:rPr>
+              <a:t/>
+            </a:r>
+            <a:r>
+              <a:rPr lang="en-US" sz="2600" b="0" u="none" strike="noStrike" dirty="0">
+                <a:solidFill>
+                  <a:schemeClr val="dk1"/>
+                </a:solidFill>
+                <a:effectLst/>
+                <a:uFillTx/>
+                <a:latin typeface="Calibri"/>
+                <a:ea typeface="Microsoft YaHei"/>
+              </a:rPr>
+              <a:t/>
+            </a:r>
+          </a:p>
+          <a:p>
+            <a:pPr marL="540000" lvl="1" algn="l" defTabSz="457200">
+              <a:lnSpc>
+                <a:spcPct val="100000"/>
+              </a:lnSpc>
+              <a:spcBef>
+                <a:spcPts val="561"/>
+              </a:spcBef>
+              <a:buClr>
+                <a:srgbClr val="000000"/>
+              </a:buClr>
+              <a:buSzPct val="45000"/>
+              <a:tabLst>
+                <a:tab pos="0" algn="l"/>
+              </a:tabLst>
+            </a:pPr>
+            <a:endParaRPr lang="en-US" sz="1100" dirty="0">
+              <a:solidFill>
+                <a:schemeClr val="dk1"/>
+              </a:solidFill>
+              <a:latin typeface="Calibri"/>
+              <a:ea typeface="Microsoft YaHei"/>
+            </a:endParaRPr>
+          </a:p>
+          <a:p>
+            <a:pPr marL="540000" lvl="1" algn="l" defTabSz="457200">
+              <a:lnSpc>
+                <a:spcPct val="100000"/>
+              </a:lnSpc>
+              <a:spcBef>
+                <a:spcPts val="561"/>
+              </a:spcBef>
+              <a:buClr>
+                <a:srgbClr val="000000"/>
+              </a:buClr>
+              <a:buSzPct val="45000"/>
+              <a:tabLst>
+                <a:tab pos="0" algn="l"/>
+              </a:tabLst>
+            </a:pPr>
+            <a:r>
+              <a:rPr lang="en-US" sz="2600" b="1" dirty="0" err="1">
+                <a:solidFill>
+                  <a:schemeClr val="dk1"/>
+                </a:solidFill>
+                <a:latin typeface="Calibri"/>
+                <a:ea typeface="Microsoft YaHei"/>
+              </a:rPr>
+              <a:t>Porcentagem</a:t>
+            </a:r>
+            <a:r>
+              <a:rPr lang="en-US" sz="2600" b="1" dirty="0">
+                <a:solidFill>
+                  <a:schemeClr val="dk1"/>
+                </a:solidFill>
+                <a:latin typeface="Calibri"/>
+                <a:ea typeface="Microsoft YaHei"/>
+              </a:rPr>
+              <a:t> de </a:t>
+            </a:r>
+            <a:r>
+              <a:rPr lang="en-US" sz="2600" b="1" dirty="0" err="1">
+                <a:solidFill>
+                  <a:schemeClr val="dk1"/>
+                </a:solidFill>
+                <a:latin typeface="Calibri"/>
+                <a:ea typeface="Microsoft YaHei"/>
+              </a:rPr>
+              <a:t>cobertura</a:t>
+            </a:r>
+            <a:r>
+              <a:rPr lang="en-US" sz="2600" b="1" dirty="0">
+                <a:solidFill>
+                  <a:schemeClr val="dk1"/>
+                </a:solidFill>
+                <a:latin typeface="Calibri"/>
+                <a:ea typeface="Microsoft YaHei"/>
+              </a:rPr>
+              <a:t> </a:t>
+            </a:r>
+            <a:r>
+              <a:rPr lang="en-US" sz="2600" b="1" dirty="0" err="1">
+                <a:solidFill>
+                  <a:schemeClr val="dk1"/>
+                </a:solidFill>
+                <a:latin typeface="Calibri"/>
+                <a:ea typeface="Microsoft YaHei"/>
+              </a:rPr>
+              <a:t>por</a:t>
+            </a:r>
+            <a:r>
+              <a:rPr lang="en-US" sz="2600" b="1" dirty="0">
+                <a:solidFill>
+                  <a:schemeClr val="dk1"/>
+                </a:solidFill>
+                <a:latin typeface="Calibri"/>
+                <a:ea typeface="Microsoft YaHei"/>
+              </a:rPr>
+              <a:t> </a:t>
+            </a:r>
+            <a:r>
+              <a:rPr lang="en-US" sz="2600" b="1" dirty="0" err="1">
+                <a:solidFill>
+                  <a:schemeClr val="dk1"/>
+                </a:solidFill>
+                <a:latin typeface="Calibri"/>
+                <a:ea typeface="Microsoft YaHei"/>
+              </a:rPr>
+              <a:t>requisito</a:t>
+            </a:r>
+            <a:r>
+              <a:rPr lang="en-US" sz="2600" dirty="0">
+                <a:solidFill>
+                  <a:schemeClr val="dk1"/>
+                </a:solidFill>
+                <a:latin typeface="Calibri"/>
+                <a:ea typeface="Microsoft YaHei"/>
+              </a:rPr>
+              <a:t>:</a:t>
+            </a:r>
+            <a:endParaRPr lang="en-US" sz="2600" b="0" u="none" strike="noStrike" dirty="0">
+              <a:solidFill>
+                <a:schemeClr val="dk1"/>
+              </a:solidFill>
+              <a:effectLst/>
+              <a:uFillTx/>
+              <a:latin typeface="Calibri"/>
+            </a:endParaRPr>
+          </a:p>
+          <a:p>
+            <a:pPr marL="864000" lvl="1" indent="-324000" algn="l" defTabSz="457200">
+              <a:lnSpc>
+                <a:spcPct val="100000"/>
+              </a:lnSpc>
+              <a:spcBef>
+                <a:spcPts val="561"/>
+              </a:spcBef>
+              <a:buClr>
+                <a:srgbClr val="000000"/>
+              </a:buClr>
+              <a:buSzPct val="45000"/>
+              <a:buFont typeface="Wingdings" charset="2"/>
+              <a:buChar char=""/>
+              <a:tabLst>
+                <a:tab pos="0" algn="l"/>
+              </a:tabLst>
+            </a:pPr>
+            <a:r>
+              <a:rPr lang="en-US" sz="2600" b="0" u="none" strike="noStrike" dirty="0">
+                <a:solidFill>
+                  <a:schemeClr val="dk1"/>
+                </a:solidFill>
+                <a:effectLst/>
+                <a:uFillTx/>
+                <a:latin typeface="Calibri"/>
+                <a:ea typeface="Microsoft YaHei"/>
+              </a:rPr>
+              <a:t>obs: divida tecnica; sem impacto direto em REQ funcional</a:t>
+            </a:r>
+            <a:r>
+              <a:rPr lang="en-US" sz="2600" b="0" u="none" strike="noStrike" dirty="0" err="1">
+                <a:solidFill>
+                  <a:schemeClr val="dk1"/>
+                </a:solidFill>
+                <a:effectLst/>
+                <a:uFillTx/>
+                <a:latin typeface="Calibri"/>
+                <a:ea typeface="Microsoft YaHei"/>
+              </a:rPr>
+              <a:t/>
+            </a:r>
+            <a:r>
+              <a:rPr lang="en-US" sz="2600" dirty="0" err="1">
+                <a:solidFill>
+                  <a:schemeClr val="dk1"/>
+                </a:solidFill>
+                <a:latin typeface="Calibri"/>
+                <a:ea typeface="Microsoft YaHei"/>
+              </a:rPr>
+              <a:t/>
+            </a:r>
+            <a:r>
+              <a:rPr lang="en-US" sz="2600" b="0" u="none" strike="noStrike" dirty="0" err="1">
+                <a:solidFill>
+                  <a:schemeClr val="dk1"/>
+                </a:solidFill>
+                <a:effectLst/>
+                <a:uFillTx/>
+                <a:latin typeface="Calibri"/>
+                <a:ea typeface="Microsoft YaHei"/>
+              </a:rPr>
+              <a:t/>
+            </a:r>
+            <a:r>
+              <a:rPr lang="en-US" sz="2600" b="0" u="none" strike="noStrike" dirty="0">
+                <a:solidFill>
+                  <a:schemeClr val="dk1"/>
+                </a:solidFill>
+                <a:effectLst/>
+                <a:uFillTx/>
+                <a:latin typeface="Calibri"/>
+                <a:ea typeface="Microsoft YaHei"/>
+              </a:rPr>
+              <a:t/>
+            </a:r>
+            <a:endParaRPr lang="en-US" sz="2600" b="0" u="none" strike="noStrike" dirty="0">
+              <a:solidFill>
+                <a:schemeClr val="dk1"/>
+              </a:solidFill>
+              <a:effectLst/>
+              <a:uFillTx/>
+              <a:latin typeface="Calibri"/>
+            </a:endParaRPr>
+          </a:p>
+        </p:txBody>
+      </p:sp>
+      <p:pic>
+        <p:nvPicPr>
+          <p:cNvPr id="72" name="Imagem 71"/>
+          <p:cNvPicPr/>
+          <p:nvPr/>
+        </p:nvPicPr>
+        <p:blipFill>
+          <a:blip r:embed="rId2"/>
+          <a:stretch/>
+        </p:blipFill>
+        <p:spPr>
+          <a:xfrm>
+            <a:off x="720" y="-28800"/>
+            <a:ext cx="9142560" cy="1647720"/>
+          </a:xfrm>
+          <a:prstGeom prst="rect">
+            <a:avLst/>
+          </a:prstGeom>
+          <a:noFill/>
+          <a:ln w="0">
+            <a:noFill/>
+          </a:ln>
+        </p:spPr>
+      </p:pic>
+      <p:sp>
+        <p:nvSpPr>
+          <p:cNvPr id="73" name="Title 3"/>
+          <p:cNvSpPr/>
+          <p:nvPr/>
+        </p:nvSpPr>
+        <p:spPr>
+          <a:xfrm>
+            <a:off x="915480" y="180000"/>
+            <a:ext cx="8228160" cy="1141560"/>
+          </a:xfrm>
+          <a:prstGeom prst="rect">
+            <a:avLst/>
+          </a:prstGeom>
+          <a:noFill/>
+          <a:ln w="0">
+            <a:noFill/>
+          </a:ln>
+        </p:spPr>
+        <p:style>
+          <a:lnRef idx="0">
+            <a:scrgbClr r="0" g="0" b="0"/>
+          </a:lnRef>
+          <a:fillRef idx="0">
+            <a:scrgbClr r="0" g="0" b="0"/>
+          </a:fillRef>
+          <a:effectRef idx="0">
+            <a:scrgbClr r="0" g="0" b="0"/>
+          </a:effectRef>
+          <a:fontRef idx="minor"/>
+        </p:style>
+        <p:txBody>
+          <a:bodyPr lIns="90000" tIns="45000" rIns="90000" bIns="45000" anchor="ctr">
+            <a:noAutofit/>
+          </a:bodyPr>
+          <a:lstStyle/>
+          <a:p>
+            <a:pPr algn="ctr" defTabSz="457200">
+              <a:lnSpc>
+                <a:spcPct val="100000"/>
+              </a:lnSpc>
+            </a:pPr>
+            <a:r>
+              <a:rPr lang="en-US" sz="4400" b="0" u="none" strike="noStrike">
+                <a:solidFill>
+                  <a:srgbClr val="EA7500"/>
+                </a:solidFill>
+                <a:effectLst/>
+                <a:uFillTx/>
+                <a:latin typeface="Calibri"/>
+              </a:rPr>
+              <a:t>Realizações da Sprint</a:t>
+            </a:r>
+            <a:endParaRPr lang="pt-BR" sz="4400" b="0" u="none" strike="noStrike">
+              <a:solidFill>
+                <a:srgbClr val="000000"/>
+              </a:solidFill>
+              <a:effectLst/>
+              <a:uFillTx/>
+              <a:latin typeface="Arial"/>
+            </a:endParaRPr>
+          </a:p>
+        </p:txBody>
+      </p:sp>
+    </p:spTree>
   </p:cSld>
   <p:clrMapOvr>
     <a:masterClrMapping/>
@@ -23373,7 +28829,7 @@
                 <a:uFillTx/>
                 <a:latin typeface="Calibri"/>
               </a:rPr>
-              <a:t>: 18</a:t>
+              <a:t>: 30</a:t>
             </a:r>
             <a:r>
               <a:rPr lang="en-US" sz="2400" b="0" u="none" strike="noStrike" dirty="0" err="1">
@@ -23457,7 +28913,7 @@
                 <a:uFillTx/>
                 <a:latin typeface="Calibri"/>
               </a:rPr>
-              <a:t>: 3</a:t>
+              <a:t>: 6</a:t>
             </a:r>
             <a:r>
               <a:rPr lang="en-US" sz="2400" b="0" u="none" strike="noStrike" dirty="0" err="1">
@@ -23530,7 +28986,7 @@
                 <a:uFillTx/>
                 <a:latin typeface="Calibri"/>
               </a:rPr>
-              <a:t>: 2</a:t>
+              <a:t>: 4</a:t>
             </a:r>
             <a:r>
               <a:rPr lang="en-US" sz="2400" b="0" u="none" strike="noStrike" dirty="0" err="1">
@@ -23603,7 +29059,7 @@
                 <a:uFillTx/>
                 <a:latin typeface="Calibri"/>
               </a:rPr>
-              <a:t>: 2</a:t>
+              <a:t>: 6</a:t>
             </a:r>
             <a:r>
               <a:rPr lang="en-US" sz="2400" b="0" u="none" strike="noStrike" dirty="0" err="1">
@@ -23822,7 +29278,7 @@
                 <a:uFillTx/>
                 <a:latin typeface="Calibri"/>
               </a:rPr>
-              <a:t>: 2</a:t>
+              <a:t>: 5</a:t>
             </a:r>
             <a:r>
               <a:rPr lang="en-US" sz="2400" b="0" u="none" strike="noStrike" dirty="0" err="1">
@@ -23979,7 +29435,7 @@
                 <a:uFillTx/>
                 <a:latin typeface="Calibri"/>
               </a:rPr>
-              <a:t>: 2</a:t>
+              <a:t>: 4</a:t>
             </a:r>
             <a:r>
               <a:rPr lang="en-US" sz="2400" b="0" u="none" strike="noStrike" dirty="0" err="1">
@@ -24255,7 +29711,7 @@
             </a:pPr>
             <a:r>
               <a:rPr lang="pt-BR" sz="2600" dirty="0"/>
-              <a:t>18/05/2026</a:t>
+              <a:t>11/06/2026</a:t>
             </a:r>
             <a:r>
               <a:rPr lang="pt-BR" sz="2600" dirty="0" err="1"/>
@@ -24263,7 +29719,7 @@
             </a:r>
             <a:r>
               <a:rPr lang="pt-BR" sz="2600" dirty="0"/>
-              <a:t> - 29/05/2026</a:t>
+              <a:t> - 25/06/2026</a:t>
             </a:r>
             <a:r>
               <a:rPr lang="pt-BR" sz="2600" dirty="0" err="1"/>
@@ -24291,7 +29747,7 @@
             </a:pPr>
             <a:r>
               <a:rPr lang="pt-BR" sz="2600" dirty="0"/>
-              <a:t>12</a:t>
+              <a:t>15</a:t>
             </a:r>
             <a:r>
               <a:rPr lang="pt-BR" sz="2600" dirty="0" err="1"/>
@@ -24490,7 +29946,7 @@
                 <a:latin typeface="Calibri"/>
                 <a:ea typeface="Microsoft YaHei"/>
               </a:rPr>
-              <a:t>Mapeamento do modelo de dados das principais tabelas (entidades + relacionamentos + diagrama ER) (alta)</a:t>
+              <a:t>REQ-002 — Executar backlog formal (T-01 a T-09): categorias 1-4, fallback condicional, captura adaptativa (alta)</a:t>
             </a:r>
             <a:r>
               <a:rPr lang="pt-BR" sz="2400" b="0" u="none" strike="noStrike" dirty="0">
@@ -24556,7 +30012,7 @@
                 <a:latin typeface="Calibri"/>
                 <a:ea typeface="Microsoft YaHei"/>
               </a:rPr>
-              <a:t>Cadastro de Tipos de Produto e Produtos (REQ-002) (alta)</a:t>
+              <a:t>REQ-016 — Concluir migração Negociação→Atendimento: T-A2 (refactor models/services), T-A11 (UI frontend) (alta)</a:t>
             </a:r>
             <a:r>
               <a:rPr lang="pt-BR" sz="2400" b="0" u="none" strike="noStrike" dirty="0">
@@ -24622,7 +30078,7 @@
                 <a:latin typeface="Calibri"/>
                 <a:ea typeface="Microsoft YaHei"/>
               </a:rPr>
-              <a:t>Escalonamento para Humano completo (REQ-004) (alta)</a:t>
+              <a:t>REQ-004 — Escalonamento para Humano completo (alta)</a:t>
             </a:r>
             <a:r>
               <a:rPr lang="pt-BR" sz="2400" b="0" u="none" strike="noStrike" dirty="0">
@@ -24688,7 +30144,7 @@
                 <a:latin typeface="Calibri"/>
                 <a:ea typeface="Microsoft YaHei"/>
               </a:rPr>
-              <a:t>Workflow de aprovação de pares Q&amp;A (notificação + histórico de revisões) (media)</a:t>
+              <a:t>Cadastro de Tipos de Produto e Produtos (REQ-002) (alta)</a:t>
             </a:r>
             <a:r>
               <a:rPr lang="pt-BR" sz="2400" b="0" u="none" strike="noStrike" dirty="0">
@@ -24754,7 +30210,7 @@
                 <a:latin typeface="Calibri"/>
                 <a:ea typeface="Microsoft YaHei"/>
               </a:rPr>
-              <a:t>Análise de sentimento e detecção de mal humor (REQ-007) (media)</a:t>
+              <a:t>REQ-013 — Workflow de aprovação de pares Q&amp;A (notificação + histórico de revisões) (media)</a:t>
             </a:r>
             <a:r>
               <a:rPr lang="pt-BR" sz="2400" b="0" u="none" strike="noStrike" dirty="0">
@@ -24820,7 +30276,7 @@
                 <a:latin typeface="Calibri"/>
                 <a:ea typeface="Microsoft YaHei"/>
               </a:rPr>
-              <a:t>Rastreamento de orçamentos (REQ-006) (media)</a:t>
+              <a:t>REQ-007 — Análise de sentimento e detecção de mal humor (media)</a:t>
             </a:r>
             <a:r>
               <a:rPr lang="pt-BR" sz="2400" b="0" u="none" strike="noStrike" dirty="0">
